--- a/public/lessons/year-6-maths/summer/week-24/find-the-area-of-parallelograms/teaching-powerpoint-v1.pptx
+++ b/public/lessons/year-6-maths/summer/week-24/find-the-area-of-parallelograms/teaching-powerpoint-v1.pptx
@@ -2,24 +2,24 @@
 <file path=ppt/presentation.xml><?xml version="1.0" encoding="utf-8"?>
 <p:presentation xmlns:p="http://schemas.openxmlformats.org/presentationml/2006/main">
   <p:sldMasterIdLst>
-    <p:sldMasterId xmlns:r="http://schemas.openxmlformats.org/officeDocument/2006/relationships" id="2147483648" r:id="R7f73f7cea4ac4274"/>
+    <p:sldMasterId xmlns:r="http://schemas.openxmlformats.org/officeDocument/2006/relationships" id="2147483648" r:id="Ra116bfd965874f44"/>
   </p:sldMasterIdLst>
   <p:notesMasterIdLst>
-    <p:notesMasterId xmlns:r="http://schemas.openxmlformats.org/officeDocument/2006/relationships" r:id="R6bf506659a024a94"/>
+    <p:notesMasterId xmlns:r="http://schemas.openxmlformats.org/officeDocument/2006/relationships" r:id="R64a7f71ed14741fd"/>
   </p:notesMasterIdLst>
   <p:sldIdLst>
-    <p:sldId xmlns:r="http://schemas.openxmlformats.org/officeDocument/2006/relationships" id="256" r:id="Rdfb6d303d4a34418"/>
-    <p:sldId xmlns:r="http://schemas.openxmlformats.org/officeDocument/2006/relationships" id="257" r:id="R9780c02bf82a4077"/>
-    <p:sldId xmlns:r="http://schemas.openxmlformats.org/officeDocument/2006/relationships" id="258" r:id="Ra21e052d9fcb4443"/>
-    <p:sldId xmlns:r="http://schemas.openxmlformats.org/officeDocument/2006/relationships" id="259" r:id="Ra12fa09f8a9d4b26"/>
-    <p:sldId xmlns:r="http://schemas.openxmlformats.org/officeDocument/2006/relationships" id="260" r:id="Rdcfd23d19f794d48"/>
-    <p:sldId xmlns:r="http://schemas.openxmlformats.org/officeDocument/2006/relationships" id="261" r:id="R7f601d3cff014ab1"/>
-    <p:sldId xmlns:r="http://schemas.openxmlformats.org/officeDocument/2006/relationships" id="262" r:id="R48d2b97d204445d2"/>
-    <p:sldId xmlns:r="http://schemas.openxmlformats.org/officeDocument/2006/relationships" id="263" r:id="R915025f66bd2468f"/>
-    <p:sldId xmlns:r="http://schemas.openxmlformats.org/officeDocument/2006/relationships" id="264" r:id="Ra005fed40ede4b6b"/>
-    <p:sldId xmlns:r="http://schemas.openxmlformats.org/officeDocument/2006/relationships" id="265" r:id="R6e6e69ca1c9c4a1c"/>
-    <p:sldId xmlns:r="http://schemas.openxmlformats.org/officeDocument/2006/relationships" id="266" r:id="R9dc4cdf53a464465"/>
-    <p:sldId xmlns:r="http://schemas.openxmlformats.org/officeDocument/2006/relationships" id="267" r:id="Recde5964c1104f09"/>
+    <p:sldId xmlns:r="http://schemas.openxmlformats.org/officeDocument/2006/relationships" id="256" r:id="R23c9bc117e1541e9"/>
+    <p:sldId xmlns:r="http://schemas.openxmlformats.org/officeDocument/2006/relationships" id="257" r:id="R2d2fd5a513274a5f"/>
+    <p:sldId xmlns:r="http://schemas.openxmlformats.org/officeDocument/2006/relationships" id="258" r:id="R7af4c5bdc81845cd"/>
+    <p:sldId xmlns:r="http://schemas.openxmlformats.org/officeDocument/2006/relationships" id="259" r:id="Rc3aed71d61a84926"/>
+    <p:sldId xmlns:r="http://schemas.openxmlformats.org/officeDocument/2006/relationships" id="260" r:id="R1b68927c91364f2b"/>
+    <p:sldId xmlns:r="http://schemas.openxmlformats.org/officeDocument/2006/relationships" id="261" r:id="R151a415f067044e0"/>
+    <p:sldId xmlns:r="http://schemas.openxmlformats.org/officeDocument/2006/relationships" id="262" r:id="R6fd419bd514248af"/>
+    <p:sldId xmlns:r="http://schemas.openxmlformats.org/officeDocument/2006/relationships" id="263" r:id="R11b122dd4ba4491f"/>
+    <p:sldId xmlns:r="http://schemas.openxmlformats.org/officeDocument/2006/relationships" id="264" r:id="Rcfdcbc00aa3941fb"/>
+    <p:sldId xmlns:r="http://schemas.openxmlformats.org/officeDocument/2006/relationships" id="265" r:id="Rfc09e1e55a5246f0"/>
+    <p:sldId xmlns:r="http://schemas.openxmlformats.org/officeDocument/2006/relationships" id="266" r:id="R31500a4408fb49de"/>
+    <p:sldId xmlns:r="http://schemas.openxmlformats.org/officeDocument/2006/relationships" id="267" r:id="Rbd885aa8fb274174"/>
   </p:sldIdLst>
   <p:sldSz cx="12192000" cy="6858000"/>
   <p:notesSz cx="6858000" cy="9144000"/>
@@ -873,7 +873,7 @@
           <a:lstStyle xmlns:a="http://schemas.openxmlformats.org/drawingml/2006/main"/>
           <a:p xmlns:a="http://schemas.openxmlformats.org/drawingml/2006/main">
             <a:r>
-              <a:t>I do. Reveal the question, setup and each calculation stage one click at a time. Pupils watch before copying. Model answer: 84 cm2.</a:t>
+              <a:t>I do. Reveal the question, then reveal each mathematical change one click at a time. Point to the numbers and operation that changed before moving to the next line. Final answer: 84 cm2.</a:t>
             </a:r>
           </a:p>
         </p:txBody>
@@ -1291,7 +1291,7 @@
   </p:cSld>
   <p:clrMap bg1="lt1" tx1="dk1" bg2="lt2" tx2="dk2" accent1="accent1" accent2="accent2" accent3="accent3" accent4="accent4" accent5="accent5" accent6="accent6" hlink="hlink" folHlink="folHlink"/>
   <p:sldLayoutIdLst>
-    <p:sldLayoutId xmlns:r="http://schemas.openxmlformats.org/officeDocument/2006/relationships" id="2147483649" r:id="R3a0c58023928406b"/>
+    <p:sldLayoutId xmlns:r="http://schemas.openxmlformats.org/officeDocument/2006/relationships" id="2147483649" r:id="R0cef4be2c8f34460"/>
   </p:sldLayoutIdLst>
   <p:txStyles>
     <p:titleStyle>
@@ -1842,7 +1842,7 @@
           <p:cNvPr id="12" name="">
             <a:extLst xmlns:a="http://schemas.openxmlformats.org/drawingml/2006/main">
               <a:ext uri="{FF2B5EF4-FFF2-40B4-BE49-F238E27FC236}">
-                <a16:creationId xmlns:a16="http://schemas.microsoft.com/office/drawing/2014/main" id="{F5CD39BC-F4CE-485E-9930-493EA3198DCF}"/>
+                <a16:creationId xmlns:a16="http://schemas.microsoft.com/office/drawing/2014/main" id="{F5E71745-ADCE-439B-B3B1-73B44785A599}"/>
               </a:ext>
             </a:extLst>
           </p:cNvPr>
@@ -1874,7 +1874,7 @@
           <p:cNvPr id="2" name="">
             <a:extLst xmlns:a="http://schemas.openxmlformats.org/drawingml/2006/main">
               <a:ext uri="{FF2B5EF4-FFF2-40B4-BE49-F238E27FC236}">
-                <a16:creationId xmlns:a16="http://schemas.microsoft.com/office/drawing/2014/main" id="{D1D87715-A837-445E-906E-8D836C64F4AB}"/>
+                <a16:creationId xmlns:a16="http://schemas.microsoft.com/office/drawing/2014/main" id="{F1F792A6-2239-4D1A-AC77-DEEC720F2C93}"/>
               </a:ext>
             </a:extLst>
           </p:cNvPr>
@@ -1931,7 +1931,7 @@
           <p:cNvPr id="3" name="">
             <a:extLst xmlns:a="http://schemas.openxmlformats.org/drawingml/2006/main">
               <a:ext uri="{FF2B5EF4-FFF2-40B4-BE49-F238E27FC236}">
-                <a16:creationId xmlns:a16="http://schemas.microsoft.com/office/drawing/2014/main" id="{9447B4BD-BF59-4DC2-834A-383D8FB034DC}"/>
+                <a16:creationId xmlns:a16="http://schemas.microsoft.com/office/drawing/2014/main" id="{5F92C7B4-ED66-426D-933F-3D015A9F6684}"/>
               </a:ext>
             </a:extLst>
           </p:cNvPr>
@@ -1965,7 +1965,7 @@
           <p:cNvPr id="4" name="">
             <a:extLst xmlns:a="http://schemas.openxmlformats.org/drawingml/2006/main">
               <a:ext uri="{FF2B5EF4-FFF2-40B4-BE49-F238E27FC236}">
-                <a16:creationId xmlns:a16="http://schemas.microsoft.com/office/drawing/2014/main" id="{2852E86C-61DF-4964-AA95-E8D687591F1D}"/>
+                <a16:creationId xmlns:a16="http://schemas.microsoft.com/office/drawing/2014/main" id="{E302CD99-74A9-44EC-8C81-1EAD30E32A7A}"/>
               </a:ext>
             </a:extLst>
           </p:cNvPr>
@@ -2022,7 +2022,7 @@
           <p:cNvPr id="5" name="">
             <a:extLst xmlns:a="http://schemas.openxmlformats.org/drawingml/2006/main">
               <a:ext uri="{FF2B5EF4-FFF2-40B4-BE49-F238E27FC236}">
-                <a16:creationId xmlns:a16="http://schemas.microsoft.com/office/drawing/2014/main" id="{1561733F-6DED-437C-95C9-7AAE4D32AC71}"/>
+                <a16:creationId xmlns:a16="http://schemas.microsoft.com/office/drawing/2014/main" id="{B00344CA-3892-4568-8FE7-BBDE43B9E20C}"/>
               </a:ext>
             </a:extLst>
           </p:cNvPr>
@@ -2079,7 +2079,7 @@
           <p:cNvPr id="6" name="">
             <a:extLst xmlns:a="http://schemas.openxmlformats.org/drawingml/2006/main">
               <a:ext uri="{FF2B5EF4-FFF2-40B4-BE49-F238E27FC236}">
-                <a16:creationId xmlns:a16="http://schemas.microsoft.com/office/drawing/2014/main" id="{9B0BA37D-3AEF-4391-80D4-680832032FED}"/>
+                <a16:creationId xmlns:a16="http://schemas.microsoft.com/office/drawing/2014/main" id="{C94C60B2-B683-42E8-A9C9-5BA358FB3E50}"/>
               </a:ext>
             </a:extLst>
           </p:cNvPr>
@@ -2113,7 +2113,7 @@
           <p:cNvPr id="7" name="">
             <a:extLst xmlns:a="http://schemas.openxmlformats.org/drawingml/2006/main">
               <a:ext uri="{FF2B5EF4-FFF2-40B4-BE49-F238E27FC236}">
-                <a16:creationId xmlns:a16="http://schemas.microsoft.com/office/drawing/2014/main" id="{4A96ADFD-70C3-467D-B779-DA12A26F6D3A}"/>
+                <a16:creationId xmlns:a16="http://schemas.microsoft.com/office/drawing/2014/main" id="{2E720BF3-99E1-400A-9395-6E6DD3C4900F}"/>
               </a:ext>
             </a:extLst>
           </p:cNvPr>
@@ -2170,7 +2170,7 @@
           <p:cNvPr id="8" name="">
             <a:extLst xmlns:a="http://schemas.openxmlformats.org/drawingml/2006/main">
               <a:ext uri="{FF2B5EF4-FFF2-40B4-BE49-F238E27FC236}">
-                <a16:creationId xmlns:a16="http://schemas.microsoft.com/office/drawing/2014/main" id="{D594B4D7-1E5E-4B94-AAFE-C95278DABB94}"/>
+                <a16:creationId xmlns:a16="http://schemas.microsoft.com/office/drawing/2014/main" id="{A1B89384-D1D3-42AD-AED3-29B52A0011E6}"/>
               </a:ext>
             </a:extLst>
           </p:cNvPr>
@@ -2227,7 +2227,7 @@
           <p:cNvPr id="9" name="">
             <a:extLst xmlns:a="http://schemas.openxmlformats.org/drawingml/2006/main">
               <a:ext uri="{FF2B5EF4-FFF2-40B4-BE49-F238E27FC236}">
-                <a16:creationId xmlns:a16="http://schemas.microsoft.com/office/drawing/2014/main" id="{5A945888-2A2D-4067-A4CC-93C1073A3FBE}"/>
+                <a16:creationId xmlns:a16="http://schemas.microsoft.com/office/drawing/2014/main" id="{FCF2958E-E617-4821-88D0-969900E6A79A}"/>
               </a:ext>
             </a:extLst>
           </p:cNvPr>
@@ -2284,7 +2284,7 @@
           <p:cNvPr id="10" name="">
             <a:extLst xmlns:a="http://schemas.openxmlformats.org/drawingml/2006/main">
               <a:ext uri="{FF2B5EF4-FFF2-40B4-BE49-F238E27FC236}">
-                <a16:creationId xmlns:a16="http://schemas.microsoft.com/office/drawing/2014/main" id="{122B904F-0B12-4D97-818C-FD00E506665C}"/>
+                <a16:creationId xmlns:a16="http://schemas.microsoft.com/office/drawing/2014/main" id="{4E3995FA-3650-4525-B82B-A818F7703EB6}"/>
               </a:ext>
             </a:extLst>
           </p:cNvPr>
@@ -2341,7 +2341,7 @@
           <p:cNvPr id="11" name="">
             <a:extLst xmlns:a="http://schemas.openxmlformats.org/drawingml/2006/main">
               <a:ext uri="{FF2B5EF4-FFF2-40B4-BE49-F238E27FC236}">
-                <a16:creationId xmlns:a16="http://schemas.microsoft.com/office/drawing/2014/main" id="{8673E283-B1DE-401A-BB56-A9E94C46FE6D}"/>
+                <a16:creationId xmlns:a16="http://schemas.microsoft.com/office/drawing/2014/main" id="{6637088A-A2AA-4486-8DBC-09D740911C67}"/>
               </a:ext>
             </a:extLst>
           </p:cNvPr>
@@ -2396,7 +2396,7 @@
     </p:spTree>
     <p:extLst>
       <p:ext uri="{BB962C8B-B14F-4D97-AF65-F5344CB8AC3E}">
-        <p14:creationId xmlns:p14="http://schemas.microsoft.com/office/powerpoint/2010/main" val="328282494"/>
+        <p14:creationId xmlns:p14="http://schemas.microsoft.com/office/powerpoint/2010/main" val="821747289"/>
       </p:ext>
     </p:extLst>
   </p:cSld>
@@ -2427,7 +2427,7 @@
           <p:cNvPr id="14" name="">
             <a:extLst xmlns:a="http://schemas.openxmlformats.org/drawingml/2006/main">
               <a:ext uri="{FF2B5EF4-FFF2-40B4-BE49-F238E27FC236}">
-                <a16:creationId xmlns:a16="http://schemas.microsoft.com/office/drawing/2014/main" id="{A6FD6821-4CA7-44C6-ADE1-4B8B2EEED9B6}"/>
+                <a16:creationId xmlns:a16="http://schemas.microsoft.com/office/drawing/2014/main" id="{8BC9D2EA-6421-4F75-AE08-85F27F298D04}"/>
               </a:ext>
             </a:extLst>
           </p:cNvPr>
@@ -2459,7 +2459,7 @@
           <p:cNvPr id="2" name="">
             <a:extLst xmlns:a="http://schemas.openxmlformats.org/drawingml/2006/main">
               <a:ext uri="{FF2B5EF4-FFF2-40B4-BE49-F238E27FC236}">
-                <a16:creationId xmlns:a16="http://schemas.microsoft.com/office/drawing/2014/main" id="{902406EE-FAAE-4B2B-9E30-21E0572D4211}"/>
+                <a16:creationId xmlns:a16="http://schemas.microsoft.com/office/drawing/2014/main" id="{19CFD742-9D00-4C19-A720-9936828061BB}"/>
               </a:ext>
             </a:extLst>
           </p:cNvPr>
@@ -2516,7 +2516,7 @@
           <p:cNvPr id="3" name="">
             <a:extLst xmlns:a="http://schemas.openxmlformats.org/drawingml/2006/main">
               <a:ext uri="{FF2B5EF4-FFF2-40B4-BE49-F238E27FC236}">
-                <a16:creationId xmlns:a16="http://schemas.microsoft.com/office/drawing/2014/main" id="{CE8FDDE3-E7D9-404E-AFD4-0A1503D5718E}"/>
+                <a16:creationId xmlns:a16="http://schemas.microsoft.com/office/drawing/2014/main" id="{4494A47A-D4F3-4DFC-ABEF-64C3BF562003}"/>
               </a:ext>
             </a:extLst>
           </p:cNvPr>
@@ -2548,7 +2548,7 @@
           <p:cNvPr id="4" name="">
             <a:extLst xmlns:a="http://schemas.openxmlformats.org/drawingml/2006/main">
               <a:ext uri="{FF2B5EF4-FFF2-40B4-BE49-F238E27FC236}">
-                <a16:creationId xmlns:a16="http://schemas.microsoft.com/office/drawing/2014/main" id="{776A62B0-5841-4426-BCF9-3EFF63697F8C}"/>
+                <a16:creationId xmlns:a16="http://schemas.microsoft.com/office/drawing/2014/main" id="{89C967DA-2222-4997-A736-DBA937EBD52F}"/>
               </a:ext>
             </a:extLst>
           </p:cNvPr>
@@ -2605,7 +2605,7 @@
           <p:cNvPr id="5" name="">
             <a:extLst xmlns:a="http://schemas.openxmlformats.org/drawingml/2006/main">
               <a:ext uri="{FF2B5EF4-FFF2-40B4-BE49-F238E27FC236}">
-                <a16:creationId xmlns:a16="http://schemas.microsoft.com/office/drawing/2014/main" id="{078DF243-5899-4C4C-8438-799AFC6DF296}"/>
+                <a16:creationId xmlns:a16="http://schemas.microsoft.com/office/drawing/2014/main" id="{AE879631-1F7D-438D-9592-7E3EA68E8412}"/>
               </a:ext>
             </a:extLst>
           </p:cNvPr>
@@ -2662,7 +2662,7 @@
           <p:cNvPr id="6" name="">
             <a:extLst xmlns:a="http://schemas.openxmlformats.org/drawingml/2006/main">
               <a:ext uri="{FF2B5EF4-FFF2-40B4-BE49-F238E27FC236}">
-                <a16:creationId xmlns:a16="http://schemas.microsoft.com/office/drawing/2014/main" id="{CD63284F-A07D-4B1E-8973-03044D95B7AC}"/>
+                <a16:creationId xmlns:a16="http://schemas.microsoft.com/office/drawing/2014/main" id="{9CFA7AED-65D8-47AE-A40C-E131F2974F2C}"/>
               </a:ext>
             </a:extLst>
           </p:cNvPr>
@@ -2719,7 +2719,7 @@
           <p:cNvPr id="7" name="">
             <a:extLst xmlns:a="http://schemas.openxmlformats.org/drawingml/2006/main">
               <a:ext uri="{FF2B5EF4-FFF2-40B4-BE49-F238E27FC236}">
-                <a16:creationId xmlns:a16="http://schemas.microsoft.com/office/drawing/2014/main" id="{3E8FC371-4BEC-443E-8445-EB9D7CBB5CD7}"/>
+                <a16:creationId xmlns:a16="http://schemas.microsoft.com/office/drawing/2014/main" id="{E630AA4B-D9C2-4EDC-AB19-3BB205111BAB}"/>
               </a:ext>
             </a:extLst>
           </p:cNvPr>
@@ -2751,7 +2751,7 @@
           <p:cNvPr id="8" name="">
             <a:extLst xmlns:a="http://schemas.openxmlformats.org/drawingml/2006/main">
               <a:ext uri="{FF2B5EF4-FFF2-40B4-BE49-F238E27FC236}">
-                <a16:creationId xmlns:a16="http://schemas.microsoft.com/office/drawing/2014/main" id="{F0097D5B-ADB4-45D0-8D7D-EC8B13D04F2B}"/>
+                <a16:creationId xmlns:a16="http://schemas.microsoft.com/office/drawing/2014/main" id="{87F97AFD-25D5-4C45-9CA2-1F17F82B8E94}"/>
               </a:ext>
             </a:extLst>
           </p:cNvPr>
@@ -2808,7 +2808,7 @@
           <p:cNvPr id="9" name="">
             <a:extLst xmlns:a="http://schemas.openxmlformats.org/drawingml/2006/main">
               <a:ext uri="{FF2B5EF4-FFF2-40B4-BE49-F238E27FC236}">
-                <a16:creationId xmlns:a16="http://schemas.microsoft.com/office/drawing/2014/main" id="{06D999E5-7CAB-48DC-97F6-0A5ED0124935}"/>
+                <a16:creationId xmlns:a16="http://schemas.microsoft.com/office/drawing/2014/main" id="{9916D9BE-F65A-47D6-82A2-533091F18C74}"/>
               </a:ext>
             </a:extLst>
           </p:cNvPr>
@@ -2865,7 +2865,7 @@
           <p:cNvPr id="10" name="">
             <a:extLst xmlns:a="http://schemas.openxmlformats.org/drawingml/2006/main">
               <a:ext uri="{FF2B5EF4-FFF2-40B4-BE49-F238E27FC236}">
-                <a16:creationId xmlns:a16="http://schemas.microsoft.com/office/drawing/2014/main" id="{CAFC48C9-AE57-4E96-8525-D9F243004C30}"/>
+                <a16:creationId xmlns:a16="http://schemas.microsoft.com/office/drawing/2014/main" id="{4B543B51-3F58-4F12-8E5A-2E9861B8DD2C}"/>
               </a:ext>
             </a:extLst>
           </p:cNvPr>
@@ -2922,7 +2922,7 @@
           <p:cNvPr id="11" name="">
             <a:extLst xmlns:a="http://schemas.openxmlformats.org/drawingml/2006/main">
               <a:ext uri="{FF2B5EF4-FFF2-40B4-BE49-F238E27FC236}">
-                <a16:creationId xmlns:a16="http://schemas.microsoft.com/office/drawing/2014/main" id="{52194B9D-258D-478B-8721-9167713A2CD1}"/>
+                <a16:creationId xmlns:a16="http://schemas.microsoft.com/office/drawing/2014/main" id="{819DBEAC-DC01-463F-9586-92D0E01AE174}"/>
               </a:ext>
             </a:extLst>
           </p:cNvPr>
@@ -2979,7 +2979,7 @@
           <p:cNvPr id="12" name="">
             <a:extLst xmlns:a="http://schemas.openxmlformats.org/drawingml/2006/main">
               <a:ext uri="{FF2B5EF4-FFF2-40B4-BE49-F238E27FC236}">
-                <a16:creationId xmlns:a16="http://schemas.microsoft.com/office/drawing/2014/main" id="{A5673857-DC1A-47A0-B24B-8B4776189F92}"/>
+                <a16:creationId xmlns:a16="http://schemas.microsoft.com/office/drawing/2014/main" id="{D32BD859-561B-4223-8CBE-94EB6A7A8790}"/>
               </a:ext>
             </a:extLst>
           </p:cNvPr>
@@ -3036,7 +3036,7 @@
           <p:cNvPr id="13" name="">
             <a:extLst xmlns:a="http://schemas.openxmlformats.org/drawingml/2006/main">
               <a:ext uri="{FF2B5EF4-FFF2-40B4-BE49-F238E27FC236}">
-                <a16:creationId xmlns:a16="http://schemas.microsoft.com/office/drawing/2014/main" id="{98F271A8-2B6A-46F5-9B83-EEBE2A871CE6}"/>
+                <a16:creationId xmlns:a16="http://schemas.microsoft.com/office/drawing/2014/main" id="{2ADAE7A6-3E3D-4F4C-B766-D23DF411C1EE}"/>
               </a:ext>
             </a:extLst>
           </p:cNvPr>
@@ -3091,7 +3091,7 @@
     </p:spTree>
     <p:extLst>
       <p:ext uri="{BB962C8B-B14F-4D97-AF65-F5344CB8AC3E}">
-        <p14:creationId xmlns:p14="http://schemas.microsoft.com/office/powerpoint/2010/main" val="1100176813"/>
+        <p14:creationId xmlns:p14="http://schemas.microsoft.com/office/powerpoint/2010/main" val="1958840311"/>
       </p:ext>
     </p:extLst>
   </p:cSld>
@@ -3292,7 +3292,7 @@
           <p:cNvPr id="19" name="">
             <a:extLst xmlns:a="http://schemas.openxmlformats.org/drawingml/2006/main">
               <a:ext uri="{FF2B5EF4-FFF2-40B4-BE49-F238E27FC236}">
-                <a16:creationId xmlns:a16="http://schemas.microsoft.com/office/drawing/2014/main" id="{E2052565-FA63-459A-837A-8B5FDFB213E1}"/>
+                <a16:creationId xmlns:a16="http://schemas.microsoft.com/office/drawing/2014/main" id="{E171DB62-99EF-401B-96DE-B3FB8E064E07}"/>
               </a:ext>
             </a:extLst>
           </p:cNvPr>
@@ -3324,7 +3324,7 @@
           <p:cNvPr id="2" name="">
             <a:extLst xmlns:a="http://schemas.openxmlformats.org/drawingml/2006/main">
               <a:ext uri="{FF2B5EF4-FFF2-40B4-BE49-F238E27FC236}">
-                <a16:creationId xmlns:a16="http://schemas.microsoft.com/office/drawing/2014/main" id="{BD8B15E2-6747-4C8D-87E3-7A762BF726B9}"/>
+                <a16:creationId xmlns:a16="http://schemas.microsoft.com/office/drawing/2014/main" id="{2432592D-561D-4656-B5F6-C97E526F1050}"/>
               </a:ext>
             </a:extLst>
           </p:cNvPr>
@@ -3381,7 +3381,7 @@
           <p:cNvPr id="3" name="">
             <a:extLst xmlns:a="http://schemas.openxmlformats.org/drawingml/2006/main">
               <a:ext uri="{FF2B5EF4-FFF2-40B4-BE49-F238E27FC236}">
-                <a16:creationId xmlns:a16="http://schemas.microsoft.com/office/drawing/2014/main" id="{184FB619-D136-4B7F-AC28-5038F3906787}"/>
+                <a16:creationId xmlns:a16="http://schemas.microsoft.com/office/drawing/2014/main" id="{4126AED4-3B1A-428A-A991-56941DF2AB5E}"/>
               </a:ext>
             </a:extLst>
           </p:cNvPr>
@@ -3413,7 +3413,7 @@
           <p:cNvPr id="4" name="">
             <a:extLst xmlns:a="http://schemas.openxmlformats.org/drawingml/2006/main">
               <a:ext uri="{FF2B5EF4-FFF2-40B4-BE49-F238E27FC236}">
-                <a16:creationId xmlns:a16="http://schemas.microsoft.com/office/drawing/2014/main" id="{95DA55DF-EC11-4987-BB91-B1914529E550}"/>
+                <a16:creationId xmlns:a16="http://schemas.microsoft.com/office/drawing/2014/main" id="{74605BB4-3CBA-49EA-9D23-793F426C4679}"/>
               </a:ext>
             </a:extLst>
           </p:cNvPr>
@@ -3470,7 +3470,7 @@
           <p:cNvPr id="5" name="">
             <a:extLst xmlns:a="http://schemas.openxmlformats.org/drawingml/2006/main">
               <a:ext uri="{FF2B5EF4-FFF2-40B4-BE49-F238E27FC236}">
-                <a16:creationId xmlns:a16="http://schemas.microsoft.com/office/drawing/2014/main" id="{8194F035-49B8-4AE7-B5B7-CDE606A0B5FA}"/>
+                <a16:creationId xmlns:a16="http://schemas.microsoft.com/office/drawing/2014/main" id="{DA1D3AFD-43CF-4D93-8CFE-34C9AAFECE40}"/>
               </a:ext>
             </a:extLst>
           </p:cNvPr>
@@ -3527,7 +3527,7 @@
           <p:cNvPr id="6" name="">
             <a:extLst xmlns:a="http://schemas.openxmlformats.org/drawingml/2006/main">
               <a:ext uri="{FF2B5EF4-FFF2-40B4-BE49-F238E27FC236}">
-                <a16:creationId xmlns:a16="http://schemas.microsoft.com/office/drawing/2014/main" id="{1160A659-0A02-459F-A3C1-FBFD106E21C0}"/>
+                <a16:creationId xmlns:a16="http://schemas.microsoft.com/office/drawing/2014/main" id="{B2F2B715-E2F9-4072-A213-D6623BE65A47}"/>
               </a:ext>
             </a:extLst>
           </p:cNvPr>
@@ -3584,7 +3584,7 @@
           <p:cNvPr id="7" name="">
             <a:extLst xmlns:a="http://schemas.openxmlformats.org/drawingml/2006/main">
               <a:ext uri="{FF2B5EF4-FFF2-40B4-BE49-F238E27FC236}">
-                <a16:creationId xmlns:a16="http://schemas.microsoft.com/office/drawing/2014/main" id="{9D24A1C0-DF92-4EEE-BB2E-119F28956766}"/>
+                <a16:creationId xmlns:a16="http://schemas.microsoft.com/office/drawing/2014/main" id="{D51FB162-C0C9-48B0-8BB2-4EF4D8E87F0E}"/>
               </a:ext>
             </a:extLst>
           </p:cNvPr>
@@ -3616,7 +3616,7 @@
           <p:cNvPr id="8" name="">
             <a:extLst xmlns:a="http://schemas.openxmlformats.org/drawingml/2006/main">
               <a:ext uri="{FF2B5EF4-FFF2-40B4-BE49-F238E27FC236}">
-                <a16:creationId xmlns:a16="http://schemas.microsoft.com/office/drawing/2014/main" id="{6FA0A83C-EDBE-45AD-A294-90C89F537777}"/>
+                <a16:creationId xmlns:a16="http://schemas.microsoft.com/office/drawing/2014/main" id="{31732538-DB06-495A-A3B4-0B5AF4619E2B}"/>
               </a:ext>
             </a:extLst>
           </p:cNvPr>
@@ -3673,7 +3673,7 @@
           <p:cNvPr id="9" name="">
             <a:extLst xmlns:a="http://schemas.openxmlformats.org/drawingml/2006/main">
               <a:ext uri="{FF2B5EF4-FFF2-40B4-BE49-F238E27FC236}">
-                <a16:creationId xmlns:a16="http://schemas.microsoft.com/office/drawing/2014/main" id="{5D414E9C-2073-438B-A562-1E5D02E670F3}"/>
+                <a16:creationId xmlns:a16="http://schemas.microsoft.com/office/drawing/2014/main" id="{22B2103B-CA9A-4149-9D47-8DAD6BE07FE8}"/>
               </a:ext>
             </a:extLst>
           </p:cNvPr>
@@ -3730,7 +3730,7 @@
           <p:cNvPr id="10" name="">
             <a:extLst xmlns:a="http://schemas.openxmlformats.org/drawingml/2006/main">
               <a:ext uri="{FF2B5EF4-FFF2-40B4-BE49-F238E27FC236}">
-                <a16:creationId xmlns:a16="http://schemas.microsoft.com/office/drawing/2014/main" id="{1F2D9CEC-B66D-477C-B3B2-ED58875CAF44}"/>
+                <a16:creationId xmlns:a16="http://schemas.microsoft.com/office/drawing/2014/main" id="{B91865DC-1538-487E-9960-DD5C3BEAB23C}"/>
               </a:ext>
             </a:extLst>
           </p:cNvPr>
@@ -3787,7 +3787,7 @@
           <p:cNvPr id="11" name="">
             <a:extLst xmlns:a="http://schemas.openxmlformats.org/drawingml/2006/main">
               <a:ext uri="{FF2B5EF4-FFF2-40B4-BE49-F238E27FC236}">
-                <a16:creationId xmlns:a16="http://schemas.microsoft.com/office/drawing/2014/main" id="{CCD672FA-544C-4075-B38C-953A7ECC7904}"/>
+                <a16:creationId xmlns:a16="http://schemas.microsoft.com/office/drawing/2014/main" id="{80B894A7-A13C-4671-AF4D-EB8A07D3E882}"/>
               </a:ext>
             </a:extLst>
           </p:cNvPr>
@@ -3821,7 +3821,7 @@
           <p:cNvPr id="12" name="">
             <a:extLst xmlns:a="http://schemas.openxmlformats.org/drawingml/2006/main">
               <a:ext uri="{FF2B5EF4-FFF2-40B4-BE49-F238E27FC236}">
-                <a16:creationId xmlns:a16="http://schemas.microsoft.com/office/drawing/2014/main" id="{FD1A3C53-29F2-4C6B-B301-93DA8A69C2E8}"/>
+                <a16:creationId xmlns:a16="http://schemas.microsoft.com/office/drawing/2014/main" id="{DDEF18DB-52C1-4803-96BD-C33B7DAF9072}"/>
               </a:ext>
             </a:extLst>
           </p:cNvPr>
@@ -3878,7 +3878,7 @@
           <p:cNvPr id="13" name="">
             <a:extLst xmlns:a="http://schemas.openxmlformats.org/drawingml/2006/main">
               <a:ext uri="{FF2B5EF4-FFF2-40B4-BE49-F238E27FC236}">
-                <a16:creationId xmlns:a16="http://schemas.microsoft.com/office/drawing/2014/main" id="{0E175B29-F69B-4FF4-812C-F2D231342352}"/>
+                <a16:creationId xmlns:a16="http://schemas.microsoft.com/office/drawing/2014/main" id="{9ACA4565-4C00-4878-ADE9-BEEBEF50E5D9}"/>
               </a:ext>
             </a:extLst>
           </p:cNvPr>
@@ -3935,7 +3935,7 @@
           <p:cNvPr id="14" name="">
             <a:extLst xmlns:a="http://schemas.openxmlformats.org/drawingml/2006/main">
               <a:ext uri="{FF2B5EF4-FFF2-40B4-BE49-F238E27FC236}">
-                <a16:creationId xmlns:a16="http://schemas.microsoft.com/office/drawing/2014/main" id="{3421CA1C-10B0-4566-B607-73CF587C2621}"/>
+                <a16:creationId xmlns:a16="http://schemas.microsoft.com/office/drawing/2014/main" id="{C8FB0EB0-B7D0-4082-82FB-807BBB16FE89}"/>
               </a:ext>
             </a:extLst>
           </p:cNvPr>
@@ -3992,7 +3992,7 @@
           <p:cNvPr id="15" name="">
             <a:extLst xmlns:a="http://schemas.openxmlformats.org/drawingml/2006/main">
               <a:ext uri="{FF2B5EF4-FFF2-40B4-BE49-F238E27FC236}">
-                <a16:creationId xmlns:a16="http://schemas.microsoft.com/office/drawing/2014/main" id="{C3264CC2-A5DE-44D1-BF3E-3C174D3E13B4}"/>
+                <a16:creationId xmlns:a16="http://schemas.microsoft.com/office/drawing/2014/main" id="{EBC5C80E-A015-4EBB-BDF9-BD733E8AD88C}"/>
               </a:ext>
             </a:extLst>
           </p:cNvPr>
@@ -4026,7 +4026,7 @@
           <p:cNvPr id="16" name="">
             <a:extLst xmlns:a="http://schemas.openxmlformats.org/drawingml/2006/main">
               <a:ext uri="{FF2B5EF4-FFF2-40B4-BE49-F238E27FC236}">
-                <a16:creationId xmlns:a16="http://schemas.microsoft.com/office/drawing/2014/main" id="{8E4973FA-54F5-4362-B050-B175D20E55B5}"/>
+                <a16:creationId xmlns:a16="http://schemas.microsoft.com/office/drawing/2014/main" id="{A39FAD84-60CF-49D5-97F1-DE63CE1DDEA9}"/>
               </a:ext>
             </a:extLst>
           </p:cNvPr>
@@ -4083,7 +4083,7 @@
           <p:cNvPr id="17" name="">
             <a:extLst xmlns:a="http://schemas.openxmlformats.org/drawingml/2006/main">
               <a:ext uri="{FF2B5EF4-FFF2-40B4-BE49-F238E27FC236}">
-                <a16:creationId xmlns:a16="http://schemas.microsoft.com/office/drawing/2014/main" id="{6026C12D-9B21-4EC8-A20B-55B7552516B5}"/>
+                <a16:creationId xmlns:a16="http://schemas.microsoft.com/office/drawing/2014/main" id="{AAC5AD76-8106-4916-A603-B8131443183F}"/>
               </a:ext>
             </a:extLst>
           </p:cNvPr>
@@ -4140,7 +4140,7 @@
           <p:cNvPr id="18" name="">
             <a:extLst xmlns:a="http://schemas.openxmlformats.org/drawingml/2006/main">
               <a:ext uri="{FF2B5EF4-FFF2-40B4-BE49-F238E27FC236}">
-                <a16:creationId xmlns:a16="http://schemas.microsoft.com/office/drawing/2014/main" id="{A2357162-FAD1-489E-8E6B-E341D69A346F}"/>
+                <a16:creationId xmlns:a16="http://schemas.microsoft.com/office/drawing/2014/main" id="{E40D46B5-5D39-45A9-B541-BF66794AB684}"/>
               </a:ext>
             </a:extLst>
           </p:cNvPr>
@@ -4195,7 +4195,7 @@
     </p:spTree>
     <p:extLst>
       <p:ext uri="{BB962C8B-B14F-4D97-AF65-F5344CB8AC3E}">
-        <p14:creationId xmlns:p14="http://schemas.microsoft.com/office/powerpoint/2010/main" val="948351218"/>
+        <p14:creationId xmlns:p14="http://schemas.microsoft.com/office/powerpoint/2010/main" val="1524515363"/>
       </p:ext>
     </p:extLst>
   </p:cSld>
@@ -4350,7 +4350,7 @@
           <p:cNvPr id="23" name="">
             <a:extLst xmlns:a="http://schemas.openxmlformats.org/drawingml/2006/main">
               <a:ext uri="{FF2B5EF4-FFF2-40B4-BE49-F238E27FC236}">
-                <a16:creationId xmlns:a16="http://schemas.microsoft.com/office/drawing/2014/main" id="{6CCDE3D4-589C-48A3-B394-9984BA5C875A}"/>
+                <a16:creationId xmlns:a16="http://schemas.microsoft.com/office/drawing/2014/main" id="{17534EFB-B166-4210-831D-3F43FA0218BA}"/>
               </a:ext>
             </a:extLst>
           </p:cNvPr>
@@ -4382,7 +4382,7 @@
           <p:cNvPr id="2" name="">
             <a:extLst xmlns:a="http://schemas.openxmlformats.org/drawingml/2006/main">
               <a:ext uri="{FF2B5EF4-FFF2-40B4-BE49-F238E27FC236}">
-                <a16:creationId xmlns:a16="http://schemas.microsoft.com/office/drawing/2014/main" id="{AF47D347-18E7-49BE-8FDB-880BCC9D5EDC}"/>
+                <a16:creationId xmlns:a16="http://schemas.microsoft.com/office/drawing/2014/main" id="{53AEFA45-DB4F-4099-A060-74878F9D8481}"/>
               </a:ext>
             </a:extLst>
           </p:cNvPr>
@@ -4439,7 +4439,7 @@
           <p:cNvPr id="3" name="">
             <a:extLst xmlns:a="http://schemas.openxmlformats.org/drawingml/2006/main">
               <a:ext uri="{FF2B5EF4-FFF2-40B4-BE49-F238E27FC236}">
-                <a16:creationId xmlns:a16="http://schemas.microsoft.com/office/drawing/2014/main" id="{11DF6DFD-19E6-4C5E-A453-A484FAD112BF}"/>
+                <a16:creationId xmlns:a16="http://schemas.microsoft.com/office/drawing/2014/main" id="{26C0BB02-04AC-43ED-BDD2-132572BE8A95}"/>
               </a:ext>
             </a:extLst>
           </p:cNvPr>
@@ -4471,7 +4471,7 @@
           <p:cNvPr id="4" name="">
             <a:extLst xmlns:a="http://schemas.openxmlformats.org/drawingml/2006/main">
               <a:ext uri="{FF2B5EF4-FFF2-40B4-BE49-F238E27FC236}">
-                <a16:creationId xmlns:a16="http://schemas.microsoft.com/office/drawing/2014/main" id="{2D8E0BE1-EA45-43B8-9061-9AA373832246}"/>
+                <a16:creationId xmlns:a16="http://schemas.microsoft.com/office/drawing/2014/main" id="{788FCA93-35AB-4585-A2EB-8655E510D600}"/>
               </a:ext>
             </a:extLst>
           </p:cNvPr>
@@ -4528,7 +4528,7 @@
           <p:cNvPr id="5" name="">
             <a:extLst xmlns:a="http://schemas.openxmlformats.org/drawingml/2006/main">
               <a:ext uri="{FF2B5EF4-FFF2-40B4-BE49-F238E27FC236}">
-                <a16:creationId xmlns:a16="http://schemas.microsoft.com/office/drawing/2014/main" id="{960CE487-6DEC-4F20-BF63-2221DA68C443}"/>
+                <a16:creationId xmlns:a16="http://schemas.microsoft.com/office/drawing/2014/main" id="{4985EDB1-7941-4761-B202-610BB04125B5}"/>
               </a:ext>
             </a:extLst>
           </p:cNvPr>
@@ -4585,7 +4585,7 @@
           <p:cNvPr id="6" name="">
             <a:extLst xmlns:a="http://schemas.openxmlformats.org/drawingml/2006/main">
               <a:ext uri="{FF2B5EF4-FFF2-40B4-BE49-F238E27FC236}">
-                <a16:creationId xmlns:a16="http://schemas.microsoft.com/office/drawing/2014/main" id="{2A27B975-231F-4BE8-BABA-52972AAD1268}"/>
+                <a16:creationId xmlns:a16="http://schemas.microsoft.com/office/drawing/2014/main" id="{AD5285B9-7519-4F15-9AF2-BFD107E58EBC}"/>
               </a:ext>
             </a:extLst>
           </p:cNvPr>
@@ -4642,7 +4642,7 @@
           <p:cNvPr id="7" name="">
             <a:extLst xmlns:a="http://schemas.openxmlformats.org/drawingml/2006/main">
               <a:ext uri="{FF2B5EF4-FFF2-40B4-BE49-F238E27FC236}">
-                <a16:creationId xmlns:a16="http://schemas.microsoft.com/office/drawing/2014/main" id="{EC0CCBD2-5F28-47D0-83D8-D98FF541ED29}"/>
+                <a16:creationId xmlns:a16="http://schemas.microsoft.com/office/drawing/2014/main" id="{1290CA2C-0A70-448B-AE1E-6B3B91938B15}"/>
               </a:ext>
             </a:extLst>
           </p:cNvPr>
@@ -4674,7 +4674,7 @@
           <p:cNvPr id="8" name="">
             <a:extLst xmlns:a="http://schemas.openxmlformats.org/drawingml/2006/main">
               <a:ext uri="{FF2B5EF4-FFF2-40B4-BE49-F238E27FC236}">
-                <a16:creationId xmlns:a16="http://schemas.microsoft.com/office/drawing/2014/main" id="{AD026605-B763-42FF-9745-A2D4CD561B8C}"/>
+                <a16:creationId xmlns:a16="http://schemas.microsoft.com/office/drawing/2014/main" id="{082F0270-CA78-4205-B110-AB244DBB3EC0}"/>
               </a:ext>
             </a:extLst>
           </p:cNvPr>
@@ -4731,7 +4731,7 @@
           <p:cNvPr id="9" name="">
             <a:extLst xmlns:a="http://schemas.openxmlformats.org/drawingml/2006/main">
               <a:ext uri="{FF2B5EF4-FFF2-40B4-BE49-F238E27FC236}">
-                <a16:creationId xmlns:a16="http://schemas.microsoft.com/office/drawing/2014/main" id="{4DFF9DD6-346D-4220-AEC7-EB863B83ADA9}"/>
+                <a16:creationId xmlns:a16="http://schemas.microsoft.com/office/drawing/2014/main" id="{1CD1CF2F-3CEA-4967-B373-B8EC838F10C6}"/>
               </a:ext>
             </a:extLst>
           </p:cNvPr>
@@ -4788,7 +4788,7 @@
           <p:cNvPr id="10" name="">
             <a:extLst xmlns:a="http://schemas.openxmlformats.org/drawingml/2006/main">
               <a:ext uri="{FF2B5EF4-FFF2-40B4-BE49-F238E27FC236}">
-                <a16:creationId xmlns:a16="http://schemas.microsoft.com/office/drawing/2014/main" id="{03CD6588-477F-4DA8-BBF8-880EDC040771}"/>
+                <a16:creationId xmlns:a16="http://schemas.microsoft.com/office/drawing/2014/main" id="{89B5072C-107F-418C-849D-974147E652F6}"/>
               </a:ext>
             </a:extLst>
           </p:cNvPr>
@@ -4822,7 +4822,7 @@
           <p:cNvPr id="11" name="">
             <a:extLst xmlns:a="http://schemas.openxmlformats.org/drawingml/2006/main">
               <a:ext uri="{FF2B5EF4-FFF2-40B4-BE49-F238E27FC236}">
-                <a16:creationId xmlns:a16="http://schemas.microsoft.com/office/drawing/2014/main" id="{6CBAD6FE-B64F-4609-9048-969A843A01B9}"/>
+                <a16:creationId xmlns:a16="http://schemas.microsoft.com/office/drawing/2014/main" id="{10265F6E-04BA-4E1F-A116-0AEC78017C0A}"/>
               </a:ext>
             </a:extLst>
           </p:cNvPr>
@@ -4854,7 +4854,7 @@
           <p:cNvPr id="12" name="">
             <a:extLst xmlns:a="http://schemas.openxmlformats.org/drawingml/2006/main">
               <a:ext uri="{FF2B5EF4-FFF2-40B4-BE49-F238E27FC236}">
-                <a16:creationId xmlns:a16="http://schemas.microsoft.com/office/drawing/2014/main" id="{251E9729-4ADD-4711-886B-135C7BFB47CA}"/>
+                <a16:creationId xmlns:a16="http://schemas.microsoft.com/office/drawing/2014/main" id="{2445742C-B33F-4C16-B201-A5D3D9FF4A11}"/>
               </a:ext>
             </a:extLst>
           </p:cNvPr>
@@ -4911,7 +4911,7 @@
           <p:cNvPr id="13" name="">
             <a:extLst xmlns:a="http://schemas.openxmlformats.org/drawingml/2006/main">
               <a:ext uri="{FF2B5EF4-FFF2-40B4-BE49-F238E27FC236}">
-                <a16:creationId xmlns:a16="http://schemas.microsoft.com/office/drawing/2014/main" id="{D5CCEC80-981F-4C2F-B095-87B1B10E449F}"/>
+                <a16:creationId xmlns:a16="http://schemas.microsoft.com/office/drawing/2014/main" id="{02F6585B-AEAB-43EE-A85C-09E7A6F2EC47}"/>
               </a:ext>
             </a:extLst>
           </p:cNvPr>
@@ -4968,7 +4968,7 @@
           <p:cNvPr id="14" name="">
             <a:extLst xmlns:a="http://schemas.openxmlformats.org/drawingml/2006/main">
               <a:ext uri="{FF2B5EF4-FFF2-40B4-BE49-F238E27FC236}">
-                <a16:creationId xmlns:a16="http://schemas.microsoft.com/office/drawing/2014/main" id="{EF062D86-F1BB-4C72-BDE8-0030F9064115}"/>
+                <a16:creationId xmlns:a16="http://schemas.microsoft.com/office/drawing/2014/main" id="{82EA5904-1ED2-4A01-9274-F871A944AF0A}"/>
               </a:ext>
             </a:extLst>
           </p:cNvPr>
@@ -5002,7 +5002,7 @@
           <p:cNvPr id="15" name="">
             <a:extLst xmlns:a="http://schemas.openxmlformats.org/drawingml/2006/main">
               <a:ext uri="{FF2B5EF4-FFF2-40B4-BE49-F238E27FC236}">
-                <a16:creationId xmlns:a16="http://schemas.microsoft.com/office/drawing/2014/main" id="{8857C19E-4B32-4540-A514-32A79F9F34A3}"/>
+                <a16:creationId xmlns:a16="http://schemas.microsoft.com/office/drawing/2014/main" id="{E33F9BC1-D714-425E-A5B6-BE5E7744EC84}"/>
               </a:ext>
             </a:extLst>
           </p:cNvPr>
@@ -5034,7 +5034,7 @@
           <p:cNvPr id="16" name="">
             <a:extLst xmlns:a="http://schemas.openxmlformats.org/drawingml/2006/main">
               <a:ext uri="{FF2B5EF4-FFF2-40B4-BE49-F238E27FC236}">
-                <a16:creationId xmlns:a16="http://schemas.microsoft.com/office/drawing/2014/main" id="{F4AE5ED6-8504-457E-8CF1-8144209F1DB4}"/>
+                <a16:creationId xmlns:a16="http://schemas.microsoft.com/office/drawing/2014/main" id="{67DAB059-01E2-450B-B990-39F3E69611F3}"/>
               </a:ext>
             </a:extLst>
           </p:cNvPr>
@@ -5091,7 +5091,7 @@
           <p:cNvPr id="17" name="">
             <a:extLst xmlns:a="http://schemas.openxmlformats.org/drawingml/2006/main">
               <a:ext uri="{FF2B5EF4-FFF2-40B4-BE49-F238E27FC236}">
-                <a16:creationId xmlns:a16="http://schemas.microsoft.com/office/drawing/2014/main" id="{3954EA32-2C60-4B16-A195-2C42E174FA3B}"/>
+                <a16:creationId xmlns:a16="http://schemas.microsoft.com/office/drawing/2014/main" id="{FD4B5765-28FF-4C5D-AA3E-FD229B7DC2B5}"/>
               </a:ext>
             </a:extLst>
           </p:cNvPr>
@@ -5148,7 +5148,7 @@
           <p:cNvPr id="18" name="">
             <a:extLst xmlns:a="http://schemas.openxmlformats.org/drawingml/2006/main">
               <a:ext uri="{FF2B5EF4-FFF2-40B4-BE49-F238E27FC236}">
-                <a16:creationId xmlns:a16="http://schemas.microsoft.com/office/drawing/2014/main" id="{526AFE5E-A90F-43A5-807A-F1BD62326B8C}"/>
+                <a16:creationId xmlns:a16="http://schemas.microsoft.com/office/drawing/2014/main" id="{129BE21C-FFE5-4BD7-93BC-35892A6AECB4}"/>
               </a:ext>
             </a:extLst>
           </p:cNvPr>
@@ -5182,7 +5182,7 @@
           <p:cNvPr id="19" name="">
             <a:extLst xmlns:a="http://schemas.openxmlformats.org/drawingml/2006/main">
               <a:ext uri="{FF2B5EF4-FFF2-40B4-BE49-F238E27FC236}">
-                <a16:creationId xmlns:a16="http://schemas.microsoft.com/office/drawing/2014/main" id="{30289986-BA1A-43A5-9730-973E8D98043F}"/>
+                <a16:creationId xmlns:a16="http://schemas.microsoft.com/office/drawing/2014/main" id="{E9BED20F-14FF-425D-BE10-A7E218BC3CC3}"/>
               </a:ext>
             </a:extLst>
           </p:cNvPr>
@@ -5214,7 +5214,7 @@
           <p:cNvPr id="20" name="">
             <a:extLst xmlns:a="http://schemas.openxmlformats.org/drawingml/2006/main">
               <a:ext uri="{FF2B5EF4-FFF2-40B4-BE49-F238E27FC236}">
-                <a16:creationId xmlns:a16="http://schemas.microsoft.com/office/drawing/2014/main" id="{C225E7AA-B7DC-4DD3-80C7-142FC8EDCCA7}"/>
+                <a16:creationId xmlns:a16="http://schemas.microsoft.com/office/drawing/2014/main" id="{A43B049D-9916-47B1-A743-92B13A455A59}"/>
               </a:ext>
             </a:extLst>
           </p:cNvPr>
@@ -5271,7 +5271,7 @@
           <p:cNvPr id="21" name="">
             <a:extLst xmlns:a="http://schemas.openxmlformats.org/drawingml/2006/main">
               <a:ext uri="{FF2B5EF4-FFF2-40B4-BE49-F238E27FC236}">
-                <a16:creationId xmlns:a16="http://schemas.microsoft.com/office/drawing/2014/main" id="{4AE41206-89DF-44F7-AE4C-B1F9E7DB48FA}"/>
+                <a16:creationId xmlns:a16="http://schemas.microsoft.com/office/drawing/2014/main" id="{65D1A28F-9408-4EE3-8C1C-590A20075EFC}"/>
               </a:ext>
             </a:extLst>
           </p:cNvPr>
@@ -5328,7 +5328,7 @@
           <p:cNvPr id="22" name="">
             <a:extLst xmlns:a="http://schemas.openxmlformats.org/drawingml/2006/main">
               <a:ext uri="{FF2B5EF4-FFF2-40B4-BE49-F238E27FC236}">
-                <a16:creationId xmlns:a16="http://schemas.microsoft.com/office/drawing/2014/main" id="{656794FB-5FC6-4689-9876-69F47D2CCF78}"/>
+                <a16:creationId xmlns:a16="http://schemas.microsoft.com/office/drawing/2014/main" id="{96A511E5-166F-4CEF-AA84-E5D486F87C0F}"/>
               </a:ext>
             </a:extLst>
           </p:cNvPr>
@@ -5383,7 +5383,7 @@
     </p:spTree>
     <p:extLst>
       <p:ext uri="{BB962C8B-B14F-4D97-AF65-F5344CB8AC3E}">
-        <p14:creationId xmlns:p14="http://schemas.microsoft.com/office/powerpoint/2010/main" val="1368299344"/>
+        <p14:creationId xmlns:p14="http://schemas.microsoft.com/office/powerpoint/2010/main" val="290749054"/>
       </p:ext>
     </p:extLst>
   </p:cSld>
@@ -5584,7 +5584,7 @@
           <p:cNvPr id="23" name="">
             <a:extLst xmlns:a="http://schemas.openxmlformats.org/drawingml/2006/main">
               <a:ext uri="{FF2B5EF4-FFF2-40B4-BE49-F238E27FC236}">
-                <a16:creationId xmlns:a16="http://schemas.microsoft.com/office/drawing/2014/main" id="{1C2C47ED-E5CC-47F7-B777-84984CBB095B}"/>
+                <a16:creationId xmlns:a16="http://schemas.microsoft.com/office/drawing/2014/main" id="{21C392F9-7CBF-479D-A515-75A671E1CC8E}"/>
               </a:ext>
             </a:extLst>
           </p:cNvPr>
@@ -5616,7 +5616,7 @@
           <p:cNvPr id="2" name="">
             <a:extLst xmlns:a="http://schemas.openxmlformats.org/drawingml/2006/main">
               <a:ext uri="{FF2B5EF4-FFF2-40B4-BE49-F238E27FC236}">
-                <a16:creationId xmlns:a16="http://schemas.microsoft.com/office/drawing/2014/main" id="{B9C958D3-A17C-4FCF-B5C0-9F84EF48D9F8}"/>
+                <a16:creationId xmlns:a16="http://schemas.microsoft.com/office/drawing/2014/main" id="{BF7D7A55-B594-4398-9436-6FB1F252FF88}"/>
               </a:ext>
             </a:extLst>
           </p:cNvPr>
@@ -5673,7 +5673,7 @@
           <p:cNvPr id="3" name="">
             <a:extLst xmlns:a="http://schemas.openxmlformats.org/drawingml/2006/main">
               <a:ext uri="{FF2B5EF4-FFF2-40B4-BE49-F238E27FC236}">
-                <a16:creationId xmlns:a16="http://schemas.microsoft.com/office/drawing/2014/main" id="{D0CCF115-7D0F-4AFB-98CD-68C38367EEB8}"/>
+                <a16:creationId xmlns:a16="http://schemas.microsoft.com/office/drawing/2014/main" id="{09E264B3-8846-4B05-8578-14FDCD878E6F}"/>
               </a:ext>
             </a:extLst>
           </p:cNvPr>
@@ -5705,7 +5705,7 @@
           <p:cNvPr id="4" name="">
             <a:extLst xmlns:a="http://schemas.openxmlformats.org/drawingml/2006/main">
               <a:ext uri="{FF2B5EF4-FFF2-40B4-BE49-F238E27FC236}">
-                <a16:creationId xmlns:a16="http://schemas.microsoft.com/office/drawing/2014/main" id="{76709EB3-DAA3-43F1-9E5E-9F39DE9D69FE}"/>
+                <a16:creationId xmlns:a16="http://schemas.microsoft.com/office/drawing/2014/main" id="{36D8FCBC-F57F-45CD-93EE-51EAA387A958}"/>
               </a:ext>
             </a:extLst>
           </p:cNvPr>
@@ -5762,7 +5762,7 @@
           <p:cNvPr id="5" name="">
             <a:extLst xmlns:a="http://schemas.openxmlformats.org/drawingml/2006/main">
               <a:ext uri="{FF2B5EF4-FFF2-40B4-BE49-F238E27FC236}">
-                <a16:creationId xmlns:a16="http://schemas.microsoft.com/office/drawing/2014/main" id="{DADBB608-305E-4CF2-97D7-13C248CB6B0E}"/>
+                <a16:creationId xmlns:a16="http://schemas.microsoft.com/office/drawing/2014/main" id="{C8EF7643-992C-4897-ACB9-EEB64A279313}"/>
               </a:ext>
             </a:extLst>
           </p:cNvPr>
@@ -5819,7 +5819,7 @@
           <p:cNvPr id="6" name="">
             <a:extLst xmlns:a="http://schemas.openxmlformats.org/drawingml/2006/main">
               <a:ext uri="{FF2B5EF4-FFF2-40B4-BE49-F238E27FC236}">
-                <a16:creationId xmlns:a16="http://schemas.microsoft.com/office/drawing/2014/main" id="{8F1483AE-E963-4DD1-8DD2-E076E924F4D6}"/>
+                <a16:creationId xmlns:a16="http://schemas.microsoft.com/office/drawing/2014/main" id="{D8C20625-7525-4747-9E15-55B77A92A7FC}"/>
               </a:ext>
             </a:extLst>
           </p:cNvPr>
@@ -5876,7 +5876,7 @@
           <p:cNvPr id="7" name="">
             <a:extLst xmlns:a="http://schemas.openxmlformats.org/drawingml/2006/main">
               <a:ext uri="{FF2B5EF4-FFF2-40B4-BE49-F238E27FC236}">
-                <a16:creationId xmlns:a16="http://schemas.microsoft.com/office/drawing/2014/main" id="{A81114A0-5A5E-4C23-BBDE-69D98C811661}"/>
+                <a16:creationId xmlns:a16="http://schemas.microsoft.com/office/drawing/2014/main" id="{D4BA85B3-53C3-43EC-8745-898827C9E265}"/>
               </a:ext>
             </a:extLst>
           </p:cNvPr>
@@ -5908,7 +5908,7 @@
           <p:cNvPr id="8" name="">
             <a:extLst xmlns:a="http://schemas.openxmlformats.org/drawingml/2006/main">
               <a:ext uri="{FF2B5EF4-FFF2-40B4-BE49-F238E27FC236}">
-                <a16:creationId xmlns:a16="http://schemas.microsoft.com/office/drawing/2014/main" id="{5A313DB2-17C2-442E-BD42-243ACF20FD4D}"/>
+                <a16:creationId xmlns:a16="http://schemas.microsoft.com/office/drawing/2014/main" id="{90B961B2-5760-436F-8951-46210BD9DBAE}"/>
               </a:ext>
             </a:extLst>
           </p:cNvPr>
@@ -5965,7 +5965,7 @@
           <p:cNvPr id="9" name="">
             <a:extLst xmlns:a="http://schemas.openxmlformats.org/drawingml/2006/main">
               <a:ext uri="{FF2B5EF4-FFF2-40B4-BE49-F238E27FC236}">
-                <a16:creationId xmlns:a16="http://schemas.microsoft.com/office/drawing/2014/main" id="{E5C7A94E-4711-4131-BC5D-6956F6C850AB}"/>
+                <a16:creationId xmlns:a16="http://schemas.microsoft.com/office/drawing/2014/main" id="{93506912-5657-4768-8534-02FFAB8512FB}"/>
               </a:ext>
             </a:extLst>
           </p:cNvPr>
@@ -6022,7 +6022,7 @@
           <p:cNvPr id="10" name="">
             <a:extLst xmlns:a="http://schemas.openxmlformats.org/drawingml/2006/main">
               <a:ext uri="{FF2B5EF4-FFF2-40B4-BE49-F238E27FC236}">
-                <a16:creationId xmlns:a16="http://schemas.microsoft.com/office/drawing/2014/main" id="{6391F66F-A626-4B3C-B028-AE27BF7B31AA}"/>
+                <a16:creationId xmlns:a16="http://schemas.microsoft.com/office/drawing/2014/main" id="{A9E070D0-E057-40A2-9101-C61991B3C4AA}"/>
               </a:ext>
             </a:extLst>
           </p:cNvPr>
@@ -6056,7 +6056,7 @@
           <p:cNvPr id="11" name="">
             <a:extLst xmlns:a="http://schemas.openxmlformats.org/drawingml/2006/main">
               <a:ext uri="{FF2B5EF4-FFF2-40B4-BE49-F238E27FC236}">
-                <a16:creationId xmlns:a16="http://schemas.microsoft.com/office/drawing/2014/main" id="{B047640A-45AF-4A86-97C2-82D044451146}"/>
+                <a16:creationId xmlns:a16="http://schemas.microsoft.com/office/drawing/2014/main" id="{6AE9B062-2837-48E1-A0C5-4DBE98A5A859}"/>
               </a:ext>
             </a:extLst>
           </p:cNvPr>
@@ -6088,7 +6088,7 @@
           <p:cNvPr id="12" name="">
             <a:extLst xmlns:a="http://schemas.openxmlformats.org/drawingml/2006/main">
               <a:ext uri="{FF2B5EF4-FFF2-40B4-BE49-F238E27FC236}">
-                <a16:creationId xmlns:a16="http://schemas.microsoft.com/office/drawing/2014/main" id="{01A0BEF8-ADA3-4DFA-9634-C10BC2D65AF7}"/>
+                <a16:creationId xmlns:a16="http://schemas.microsoft.com/office/drawing/2014/main" id="{5E61083A-6089-4471-A975-64B1A3F2BC90}"/>
               </a:ext>
             </a:extLst>
           </p:cNvPr>
@@ -6145,7 +6145,7 @@
           <p:cNvPr id="13" name="">
             <a:extLst xmlns:a="http://schemas.openxmlformats.org/drawingml/2006/main">
               <a:ext uri="{FF2B5EF4-FFF2-40B4-BE49-F238E27FC236}">
-                <a16:creationId xmlns:a16="http://schemas.microsoft.com/office/drawing/2014/main" id="{8D9979AE-2054-44F3-94C6-27E04F5CBD30}"/>
+                <a16:creationId xmlns:a16="http://schemas.microsoft.com/office/drawing/2014/main" id="{D4706BE4-105E-4ED0-B248-77A65B09F254}"/>
               </a:ext>
             </a:extLst>
           </p:cNvPr>
@@ -6202,7 +6202,7 @@
           <p:cNvPr id="14" name="">
             <a:extLst xmlns:a="http://schemas.openxmlformats.org/drawingml/2006/main">
               <a:ext uri="{FF2B5EF4-FFF2-40B4-BE49-F238E27FC236}">
-                <a16:creationId xmlns:a16="http://schemas.microsoft.com/office/drawing/2014/main" id="{8CDF439E-B4C3-4D44-B76D-390D7B7329DD}"/>
+                <a16:creationId xmlns:a16="http://schemas.microsoft.com/office/drawing/2014/main" id="{EBDA5901-299A-4C16-B952-E39F969E8E08}"/>
               </a:ext>
             </a:extLst>
           </p:cNvPr>
@@ -6236,7 +6236,7 @@
           <p:cNvPr id="15" name="">
             <a:extLst xmlns:a="http://schemas.openxmlformats.org/drawingml/2006/main">
               <a:ext uri="{FF2B5EF4-FFF2-40B4-BE49-F238E27FC236}">
-                <a16:creationId xmlns:a16="http://schemas.microsoft.com/office/drawing/2014/main" id="{5445FB91-5A3A-4640-89FE-B4A5CB2A2C3A}"/>
+                <a16:creationId xmlns:a16="http://schemas.microsoft.com/office/drawing/2014/main" id="{D6B10E8B-9A76-402A-9D35-09D7EA5736BC}"/>
               </a:ext>
             </a:extLst>
           </p:cNvPr>
@@ -6268,7 +6268,7 @@
           <p:cNvPr id="16" name="">
             <a:extLst xmlns:a="http://schemas.openxmlformats.org/drawingml/2006/main">
               <a:ext uri="{FF2B5EF4-FFF2-40B4-BE49-F238E27FC236}">
-                <a16:creationId xmlns:a16="http://schemas.microsoft.com/office/drawing/2014/main" id="{A0751932-59E9-4B77-B985-D3102297DE5B}"/>
+                <a16:creationId xmlns:a16="http://schemas.microsoft.com/office/drawing/2014/main" id="{0537B165-AD32-4D31-A2C4-B17A8738C4AE}"/>
               </a:ext>
             </a:extLst>
           </p:cNvPr>
@@ -6325,7 +6325,7 @@
           <p:cNvPr id="17" name="">
             <a:extLst xmlns:a="http://schemas.openxmlformats.org/drawingml/2006/main">
               <a:ext uri="{FF2B5EF4-FFF2-40B4-BE49-F238E27FC236}">
-                <a16:creationId xmlns:a16="http://schemas.microsoft.com/office/drawing/2014/main" id="{209AB30A-E7FA-4D2C-9DB0-EC7CA36E18D3}"/>
+                <a16:creationId xmlns:a16="http://schemas.microsoft.com/office/drawing/2014/main" id="{676AF7BE-6DEE-48E4-8BED-3BC874058970}"/>
               </a:ext>
             </a:extLst>
           </p:cNvPr>
@@ -6382,7 +6382,7 @@
           <p:cNvPr id="18" name="">
             <a:extLst xmlns:a="http://schemas.openxmlformats.org/drawingml/2006/main">
               <a:ext uri="{FF2B5EF4-FFF2-40B4-BE49-F238E27FC236}">
-                <a16:creationId xmlns:a16="http://schemas.microsoft.com/office/drawing/2014/main" id="{BFDAA030-F712-40D3-A0F2-37F8133BADA6}"/>
+                <a16:creationId xmlns:a16="http://schemas.microsoft.com/office/drawing/2014/main" id="{4C7AE446-142C-48B1-919C-0EFE8A2A20DC}"/>
               </a:ext>
             </a:extLst>
           </p:cNvPr>
@@ -6416,7 +6416,7 @@
           <p:cNvPr id="19" name="">
             <a:extLst xmlns:a="http://schemas.openxmlformats.org/drawingml/2006/main">
               <a:ext uri="{FF2B5EF4-FFF2-40B4-BE49-F238E27FC236}">
-                <a16:creationId xmlns:a16="http://schemas.microsoft.com/office/drawing/2014/main" id="{C89E27B8-F8FB-41A0-A98E-2C97904604C3}"/>
+                <a16:creationId xmlns:a16="http://schemas.microsoft.com/office/drawing/2014/main" id="{CE249F73-CE2F-40AA-AF16-CA3D5334CDF2}"/>
               </a:ext>
             </a:extLst>
           </p:cNvPr>
@@ -6448,7 +6448,7 @@
           <p:cNvPr id="20" name="">
             <a:extLst xmlns:a="http://schemas.openxmlformats.org/drawingml/2006/main">
               <a:ext uri="{FF2B5EF4-FFF2-40B4-BE49-F238E27FC236}">
-                <a16:creationId xmlns:a16="http://schemas.microsoft.com/office/drawing/2014/main" id="{EC1612C6-3FFD-4C4C-891E-90FC24190200}"/>
+                <a16:creationId xmlns:a16="http://schemas.microsoft.com/office/drawing/2014/main" id="{9456FB97-9D70-4743-AC95-CF91E71F1AB5}"/>
               </a:ext>
             </a:extLst>
           </p:cNvPr>
@@ -6505,7 +6505,7 @@
           <p:cNvPr id="21" name="">
             <a:extLst xmlns:a="http://schemas.openxmlformats.org/drawingml/2006/main">
               <a:ext uri="{FF2B5EF4-FFF2-40B4-BE49-F238E27FC236}">
-                <a16:creationId xmlns:a16="http://schemas.microsoft.com/office/drawing/2014/main" id="{97DD0A9A-89F6-44D6-8DE7-2B2702E2FEA6}"/>
+                <a16:creationId xmlns:a16="http://schemas.microsoft.com/office/drawing/2014/main" id="{47873995-7B0A-49E5-98F8-22842EBA071D}"/>
               </a:ext>
             </a:extLst>
           </p:cNvPr>
@@ -6562,7 +6562,7 @@
           <p:cNvPr id="22" name="">
             <a:extLst xmlns:a="http://schemas.openxmlformats.org/drawingml/2006/main">
               <a:ext uri="{FF2B5EF4-FFF2-40B4-BE49-F238E27FC236}">
-                <a16:creationId xmlns:a16="http://schemas.microsoft.com/office/drawing/2014/main" id="{87866FD9-4C77-4280-A9C3-B05F80718C71}"/>
+                <a16:creationId xmlns:a16="http://schemas.microsoft.com/office/drawing/2014/main" id="{E5B63617-EFE7-4359-8B38-CCF08A050427}"/>
               </a:ext>
             </a:extLst>
           </p:cNvPr>
@@ -6617,7 +6617,7 @@
     </p:spTree>
     <p:extLst>
       <p:ext uri="{BB962C8B-B14F-4D97-AF65-F5344CB8AC3E}">
-        <p14:creationId xmlns:p14="http://schemas.microsoft.com/office/powerpoint/2010/main" val="943957656"/>
+        <p14:creationId xmlns:p14="http://schemas.microsoft.com/office/powerpoint/2010/main" val="1273149161"/>
       </p:ext>
     </p:extLst>
   </p:cSld>
@@ -6818,7 +6818,7 @@
           <p:cNvPr id="16" name="">
             <a:extLst xmlns:a="http://schemas.openxmlformats.org/drawingml/2006/main">
               <a:ext uri="{FF2B5EF4-FFF2-40B4-BE49-F238E27FC236}">
-                <a16:creationId xmlns:a16="http://schemas.microsoft.com/office/drawing/2014/main" id="{CEB2466F-10EA-48A5-A592-196FDFD15A08}"/>
+                <a16:creationId xmlns:a16="http://schemas.microsoft.com/office/drawing/2014/main" id="{2447A8A1-D613-4FCC-B6B2-260D4BCCCCC7}"/>
               </a:ext>
             </a:extLst>
           </p:cNvPr>
@@ -6850,7 +6850,7 @@
           <p:cNvPr id="2" name="">
             <a:extLst xmlns:a="http://schemas.openxmlformats.org/drawingml/2006/main">
               <a:ext uri="{FF2B5EF4-FFF2-40B4-BE49-F238E27FC236}">
-                <a16:creationId xmlns:a16="http://schemas.microsoft.com/office/drawing/2014/main" id="{50D29AF4-6487-4F10-B6EF-C555C04EE38F}"/>
+                <a16:creationId xmlns:a16="http://schemas.microsoft.com/office/drawing/2014/main" id="{3998CBBC-6EEC-4EAB-89E0-E05D72D010F9}"/>
               </a:ext>
             </a:extLst>
           </p:cNvPr>
@@ -6907,7 +6907,7 @@
           <p:cNvPr id="3" name="">
             <a:extLst xmlns:a="http://schemas.openxmlformats.org/drawingml/2006/main">
               <a:ext uri="{FF2B5EF4-FFF2-40B4-BE49-F238E27FC236}">
-                <a16:creationId xmlns:a16="http://schemas.microsoft.com/office/drawing/2014/main" id="{3DB51772-9CA8-49DD-8DE5-CB4B3D8A1C0A}"/>
+                <a16:creationId xmlns:a16="http://schemas.microsoft.com/office/drawing/2014/main" id="{571381AC-413F-411E-A0D4-1F6956FA2771}"/>
               </a:ext>
             </a:extLst>
           </p:cNvPr>
@@ -6939,7 +6939,7 @@
           <p:cNvPr id="4" name="">
             <a:extLst xmlns:a="http://schemas.openxmlformats.org/drawingml/2006/main">
               <a:ext uri="{FF2B5EF4-FFF2-40B4-BE49-F238E27FC236}">
-                <a16:creationId xmlns:a16="http://schemas.microsoft.com/office/drawing/2014/main" id="{DB31228D-5620-4A9B-B438-28A88FD7A8C7}"/>
+                <a16:creationId xmlns:a16="http://schemas.microsoft.com/office/drawing/2014/main" id="{DC6660CF-4B32-4A12-B69A-E913CA016BF4}"/>
               </a:ext>
             </a:extLst>
           </p:cNvPr>
@@ -6996,7 +6996,7 @@
           <p:cNvPr id="5" name="">
             <a:extLst xmlns:a="http://schemas.openxmlformats.org/drawingml/2006/main">
               <a:ext uri="{FF2B5EF4-FFF2-40B4-BE49-F238E27FC236}">
-                <a16:creationId xmlns:a16="http://schemas.microsoft.com/office/drawing/2014/main" id="{341D9C18-CADB-47D8-A772-68213E44FCC5}"/>
+                <a16:creationId xmlns:a16="http://schemas.microsoft.com/office/drawing/2014/main" id="{4BF947FE-1146-4177-BA2C-876E04DDED00}"/>
               </a:ext>
             </a:extLst>
           </p:cNvPr>
@@ -7053,7 +7053,7 @@
           <p:cNvPr id="6" name="">
             <a:extLst xmlns:a="http://schemas.openxmlformats.org/drawingml/2006/main">
               <a:ext uri="{FF2B5EF4-FFF2-40B4-BE49-F238E27FC236}">
-                <a16:creationId xmlns:a16="http://schemas.microsoft.com/office/drawing/2014/main" id="{93CCE501-5EE8-4253-A6CA-152AC7264E4E}"/>
+                <a16:creationId xmlns:a16="http://schemas.microsoft.com/office/drawing/2014/main" id="{C3E3C395-77C3-494A-AB31-F00B804CA31F}"/>
               </a:ext>
             </a:extLst>
           </p:cNvPr>
@@ -7110,7 +7110,7 @@
           <p:cNvPr id="7" name="">
             <a:extLst xmlns:a="http://schemas.openxmlformats.org/drawingml/2006/main">
               <a:ext uri="{FF2B5EF4-FFF2-40B4-BE49-F238E27FC236}">
-                <a16:creationId xmlns:a16="http://schemas.microsoft.com/office/drawing/2014/main" id="{B32B6603-815F-46B9-ADBE-E450BAC58A62}"/>
+                <a16:creationId xmlns:a16="http://schemas.microsoft.com/office/drawing/2014/main" id="{239927BE-28C5-4EA3-9F2B-05EB48648EFB}"/>
               </a:ext>
             </a:extLst>
           </p:cNvPr>
@@ -7142,7 +7142,7 @@
           <p:cNvPr id="8" name="">
             <a:extLst xmlns:a="http://schemas.openxmlformats.org/drawingml/2006/main">
               <a:ext uri="{FF2B5EF4-FFF2-40B4-BE49-F238E27FC236}">
-                <a16:creationId xmlns:a16="http://schemas.microsoft.com/office/drawing/2014/main" id="{C2361AA8-21DB-4B5D-B5CF-B43E11E1BC87}"/>
+                <a16:creationId xmlns:a16="http://schemas.microsoft.com/office/drawing/2014/main" id="{B2AF5235-59DC-471B-B461-A6D8EC256000}"/>
               </a:ext>
             </a:extLst>
           </p:cNvPr>
@@ -7199,7 +7199,7 @@
           <p:cNvPr id="9" name="">
             <a:extLst xmlns:a="http://schemas.openxmlformats.org/drawingml/2006/main">
               <a:ext uri="{FF2B5EF4-FFF2-40B4-BE49-F238E27FC236}">
-                <a16:creationId xmlns:a16="http://schemas.microsoft.com/office/drawing/2014/main" id="{EB995AC6-8EF1-4107-847C-B5FA63F76F2F}"/>
+                <a16:creationId xmlns:a16="http://schemas.microsoft.com/office/drawing/2014/main" id="{47978DB6-1CBC-4A72-9A7C-75389848520A}"/>
               </a:ext>
             </a:extLst>
           </p:cNvPr>
@@ -7256,7 +7256,7 @@
           <p:cNvPr id="10" name="">
             <a:extLst xmlns:a="http://schemas.openxmlformats.org/drawingml/2006/main">
               <a:ext uri="{FF2B5EF4-FFF2-40B4-BE49-F238E27FC236}">
-                <a16:creationId xmlns:a16="http://schemas.microsoft.com/office/drawing/2014/main" id="{61F475E6-DAC7-4FB9-81CE-1F6BE40F2309}"/>
+                <a16:creationId xmlns:a16="http://schemas.microsoft.com/office/drawing/2014/main" id="{5827C166-ACE9-4135-9FF9-B93CA0BF8BC9}"/>
               </a:ext>
             </a:extLst>
           </p:cNvPr>
@@ -7313,7 +7313,7 @@
           <p:cNvPr id="11" name="">
             <a:extLst xmlns:a="http://schemas.openxmlformats.org/drawingml/2006/main">
               <a:ext uri="{FF2B5EF4-FFF2-40B4-BE49-F238E27FC236}">
-                <a16:creationId xmlns:a16="http://schemas.microsoft.com/office/drawing/2014/main" id="{51F4BDBC-E47F-422B-8EDE-700DD845308D}"/>
+                <a16:creationId xmlns:a16="http://schemas.microsoft.com/office/drawing/2014/main" id="{020973BA-62A2-47F3-854B-BFD88E67021E}"/>
               </a:ext>
             </a:extLst>
           </p:cNvPr>
@@ -7345,7 +7345,7 @@
           <p:cNvPr id="12" name="">
             <a:extLst xmlns:a="http://schemas.openxmlformats.org/drawingml/2006/main">
               <a:ext uri="{FF2B5EF4-FFF2-40B4-BE49-F238E27FC236}">
-                <a16:creationId xmlns:a16="http://schemas.microsoft.com/office/drawing/2014/main" id="{D789EC8B-813A-460D-A251-B8E4E397FC75}"/>
+                <a16:creationId xmlns:a16="http://schemas.microsoft.com/office/drawing/2014/main" id="{31EEBFAF-0F8E-4805-B64C-7E181D7AB76E}"/>
               </a:ext>
             </a:extLst>
           </p:cNvPr>
@@ -7402,7 +7402,7 @@
           <p:cNvPr id="13" name="">
             <a:extLst xmlns:a="http://schemas.openxmlformats.org/drawingml/2006/main">
               <a:ext uri="{FF2B5EF4-FFF2-40B4-BE49-F238E27FC236}">
-                <a16:creationId xmlns:a16="http://schemas.microsoft.com/office/drawing/2014/main" id="{27DD2C97-9207-49AE-A3C2-2BA62F701F5E}"/>
+                <a16:creationId xmlns:a16="http://schemas.microsoft.com/office/drawing/2014/main" id="{A4541E0E-9C9B-4C14-93A1-BF01EFBDA2C2}"/>
               </a:ext>
             </a:extLst>
           </p:cNvPr>
@@ -7459,7 +7459,7 @@
           <p:cNvPr id="14" name="">
             <a:extLst xmlns:a="http://schemas.openxmlformats.org/drawingml/2006/main">
               <a:ext uri="{FF2B5EF4-FFF2-40B4-BE49-F238E27FC236}">
-                <a16:creationId xmlns:a16="http://schemas.microsoft.com/office/drawing/2014/main" id="{0E866DDC-A736-44CC-AF66-38B3FBA3D19A}"/>
+                <a16:creationId xmlns:a16="http://schemas.microsoft.com/office/drawing/2014/main" id="{6A36C2CD-53D0-4F11-857D-C1CDD8E8CD7B}"/>
               </a:ext>
             </a:extLst>
           </p:cNvPr>
@@ -7516,7 +7516,7 @@
           <p:cNvPr id="15" name="">
             <a:extLst xmlns:a="http://schemas.openxmlformats.org/drawingml/2006/main">
               <a:ext uri="{FF2B5EF4-FFF2-40B4-BE49-F238E27FC236}">
-                <a16:creationId xmlns:a16="http://schemas.microsoft.com/office/drawing/2014/main" id="{597B7A99-E144-4F6E-8283-EFF5C4858161}"/>
+                <a16:creationId xmlns:a16="http://schemas.microsoft.com/office/drawing/2014/main" id="{0590B4AF-51E8-4C75-A206-D53BA85C633B}"/>
               </a:ext>
             </a:extLst>
           </p:cNvPr>
@@ -7571,7 +7571,7 @@
     </p:spTree>
     <p:extLst>
       <p:ext uri="{BB962C8B-B14F-4D97-AF65-F5344CB8AC3E}">
-        <p14:creationId xmlns:p14="http://schemas.microsoft.com/office/powerpoint/2010/main" val="2139538855"/>
+        <p14:creationId xmlns:p14="http://schemas.microsoft.com/office/powerpoint/2010/main" val="790679464"/>
       </p:ext>
     </p:extLst>
   </p:cSld>
@@ -7772,7 +7772,7 @@
           <p:cNvPr id="23" name="">
             <a:extLst xmlns:a="http://schemas.openxmlformats.org/drawingml/2006/main">
               <a:ext uri="{FF2B5EF4-FFF2-40B4-BE49-F238E27FC236}">
-                <a16:creationId xmlns:a16="http://schemas.microsoft.com/office/drawing/2014/main" id="{AB943645-014F-4BE8-A058-2353788D892B}"/>
+                <a16:creationId xmlns:a16="http://schemas.microsoft.com/office/drawing/2014/main" id="{731C759D-C868-4E78-A133-7E91D69B747A}"/>
               </a:ext>
             </a:extLst>
           </p:cNvPr>
@@ -7804,7 +7804,7 @@
           <p:cNvPr id="2" name="">
             <a:extLst xmlns:a="http://schemas.openxmlformats.org/drawingml/2006/main">
               <a:ext uri="{FF2B5EF4-FFF2-40B4-BE49-F238E27FC236}">
-                <a16:creationId xmlns:a16="http://schemas.microsoft.com/office/drawing/2014/main" id="{16566375-17B2-4F58-AAA2-A6F4BB9D3A47}"/>
+                <a16:creationId xmlns:a16="http://schemas.microsoft.com/office/drawing/2014/main" id="{7AB49E17-E348-4F42-B824-2D5C75706C3C}"/>
               </a:ext>
             </a:extLst>
           </p:cNvPr>
@@ -7861,7 +7861,7 @@
           <p:cNvPr id="3" name="">
             <a:extLst xmlns:a="http://schemas.openxmlformats.org/drawingml/2006/main">
               <a:ext uri="{FF2B5EF4-FFF2-40B4-BE49-F238E27FC236}">
-                <a16:creationId xmlns:a16="http://schemas.microsoft.com/office/drawing/2014/main" id="{8A0CC4E2-B18F-47FD-A31A-12BFC0FEE968}"/>
+                <a16:creationId xmlns:a16="http://schemas.microsoft.com/office/drawing/2014/main" id="{403D5D4C-AEA5-42F8-94E9-F5DCFF57497A}"/>
               </a:ext>
             </a:extLst>
           </p:cNvPr>
@@ -7893,7 +7893,7 @@
           <p:cNvPr id="4" name="">
             <a:extLst xmlns:a="http://schemas.openxmlformats.org/drawingml/2006/main">
               <a:ext uri="{FF2B5EF4-FFF2-40B4-BE49-F238E27FC236}">
-                <a16:creationId xmlns:a16="http://schemas.microsoft.com/office/drawing/2014/main" id="{5FFAEC17-89E1-46E9-8414-13FC0E9415E6}"/>
+                <a16:creationId xmlns:a16="http://schemas.microsoft.com/office/drawing/2014/main" id="{923B8811-472A-4FAF-BFB2-2956A22DB302}"/>
               </a:ext>
             </a:extLst>
           </p:cNvPr>
@@ -7950,7 +7950,7 @@
           <p:cNvPr id="5" name="">
             <a:extLst xmlns:a="http://schemas.openxmlformats.org/drawingml/2006/main">
               <a:ext uri="{FF2B5EF4-FFF2-40B4-BE49-F238E27FC236}">
-                <a16:creationId xmlns:a16="http://schemas.microsoft.com/office/drawing/2014/main" id="{A19BEC1C-0B5D-4DFD-BF99-18C88F2F088A}"/>
+                <a16:creationId xmlns:a16="http://schemas.microsoft.com/office/drawing/2014/main" id="{D3C84C1C-3F23-4003-B66A-F67BDD08AD1D}"/>
               </a:ext>
             </a:extLst>
           </p:cNvPr>
@@ -8007,7 +8007,7 @@
           <p:cNvPr id="6" name="">
             <a:extLst xmlns:a="http://schemas.openxmlformats.org/drawingml/2006/main">
               <a:ext uri="{FF2B5EF4-FFF2-40B4-BE49-F238E27FC236}">
-                <a16:creationId xmlns:a16="http://schemas.microsoft.com/office/drawing/2014/main" id="{6972ACFC-D385-42A3-B5D5-540236A04F7A}"/>
+                <a16:creationId xmlns:a16="http://schemas.microsoft.com/office/drawing/2014/main" id="{BD27779F-795E-4596-9683-8CA34797E476}"/>
               </a:ext>
             </a:extLst>
           </p:cNvPr>
@@ -8064,7 +8064,7 @@
           <p:cNvPr id="7" name="">
             <a:extLst xmlns:a="http://schemas.openxmlformats.org/drawingml/2006/main">
               <a:ext uri="{FF2B5EF4-FFF2-40B4-BE49-F238E27FC236}">
-                <a16:creationId xmlns:a16="http://schemas.microsoft.com/office/drawing/2014/main" id="{5238771E-AECB-4326-B82F-7AD8347A1295}"/>
+                <a16:creationId xmlns:a16="http://schemas.microsoft.com/office/drawing/2014/main" id="{66A45B82-E137-435C-91E7-6226F84F6F9A}"/>
               </a:ext>
             </a:extLst>
           </p:cNvPr>
@@ -8096,7 +8096,7 @@
           <p:cNvPr id="8" name="">
             <a:extLst xmlns:a="http://schemas.openxmlformats.org/drawingml/2006/main">
               <a:ext uri="{FF2B5EF4-FFF2-40B4-BE49-F238E27FC236}">
-                <a16:creationId xmlns:a16="http://schemas.microsoft.com/office/drawing/2014/main" id="{17A6B1F2-DD8E-4979-B132-8DCC711CD0E7}"/>
+                <a16:creationId xmlns:a16="http://schemas.microsoft.com/office/drawing/2014/main" id="{429F4898-5EE8-4DB2-B74B-B4894C1909A4}"/>
               </a:ext>
             </a:extLst>
           </p:cNvPr>
@@ -8153,7 +8153,7 @@
           <p:cNvPr id="9" name="">
             <a:extLst xmlns:a="http://schemas.openxmlformats.org/drawingml/2006/main">
               <a:ext uri="{FF2B5EF4-FFF2-40B4-BE49-F238E27FC236}">
-                <a16:creationId xmlns:a16="http://schemas.microsoft.com/office/drawing/2014/main" id="{314759C7-05C3-4BE8-8E35-EFDDBF56163B}"/>
+                <a16:creationId xmlns:a16="http://schemas.microsoft.com/office/drawing/2014/main" id="{0BB49B3D-C5E3-4DF7-A761-B2DCEDD5EC34}"/>
               </a:ext>
             </a:extLst>
           </p:cNvPr>
@@ -8210,19 +8210,19 @@
           <p:cNvPr id="10" name="">
             <a:extLst xmlns:a="http://schemas.openxmlformats.org/drawingml/2006/main">
               <a:ext uri="{FF2B5EF4-FFF2-40B4-BE49-F238E27FC236}">
-                <a16:creationId xmlns:a16="http://schemas.microsoft.com/office/drawing/2014/main" id="{AB34FFCC-C788-4CB5-9EE5-9B691A00904D}"/>
-              </a:ext>
-            </a:extLst>
-          </p:cNvPr>
-          <p:cNvSpPr>
-            <a:spLocks xmlns:a="http://schemas.openxmlformats.org/drawingml/2006/main" noGrp="1"/>
-          </p:cNvSpPr>
-          <p:nvPr/>
-        </p:nvSpPr>
-        <p:spPr>
-          <a:xfrm xmlns:a="http://schemas.openxmlformats.org/drawingml/2006/main">
-            <a:off x="914400" y="1257300"/>
-            <a:ext cx="10363200" cy="781050"/>
+                <a16:creationId xmlns:a16="http://schemas.microsoft.com/office/drawing/2014/main" id="{D5CC2804-F3D9-4333-84B5-878EFDE0A1B6}"/>
+              </a:ext>
+            </a:extLst>
+          </p:cNvPr>
+          <p:cNvSpPr>
+            <a:spLocks xmlns:a="http://schemas.openxmlformats.org/drawingml/2006/main" noGrp="1"/>
+          </p:cNvSpPr>
+          <p:nvPr/>
+        </p:nvSpPr>
+        <p:spPr>
+          <a:xfrm xmlns:a="http://schemas.openxmlformats.org/drawingml/2006/main">
+            <a:off x="857250" y="1219200"/>
+            <a:ext cx="10477500" cy="742950"/>
           </a:xfrm>
           <a:prstGeom xmlns:a="http://schemas.openxmlformats.org/drawingml/2006/main" prst="rect">
             <a:avLst/>
@@ -8239,7 +8239,7 @@
           <a:lstStyle xmlns:a="http://schemas.openxmlformats.org/drawingml/2006/main"/>
           <a:p xmlns:a="http://schemas.openxmlformats.org/drawingml/2006/main">
             <a:pPr algn="ctr">
-              <a:defRPr sz="2175" b="1">
+              <a:defRPr sz="2100" b="1">
                 <a:solidFill>
                   <a:srgbClr val="17253A"/>
                 </a:solidFill>
@@ -8249,7 +8249,7 @@
               </a:defRPr>
             </a:pPr>
             <a:r>
-              <a:rPr sz="2175" b="1">
+              <a:rPr sz="2100" b="1">
                 <a:solidFill>
                   <a:srgbClr val="17253A"/>
                 </a:solidFill>
@@ -8267,28 +8267,30 @@
           <p:cNvPr id="11" name="">
             <a:extLst xmlns:a="http://schemas.openxmlformats.org/drawingml/2006/main">
               <a:ext uri="{FF2B5EF4-FFF2-40B4-BE49-F238E27FC236}">
-                <a16:creationId xmlns:a16="http://schemas.microsoft.com/office/drawing/2014/main" id="{12DA15BB-6AAA-4EB1-8FD4-3823BF44CC5D}"/>
-              </a:ext>
-            </a:extLst>
-          </p:cNvPr>
-          <p:cNvSpPr>
-            <a:spLocks xmlns:a="http://schemas.openxmlformats.org/drawingml/2006/main" noGrp="1"/>
-          </p:cNvSpPr>
-          <p:nvPr/>
-        </p:nvSpPr>
-        <p:spPr>
-          <a:xfrm xmlns:a="http://schemas.openxmlformats.org/drawingml/2006/main">
-            <a:off x="1000125" y="2247900"/>
-            <a:ext cx="476250" cy="476250"/>
-          </a:xfrm>
-          <a:prstGeom xmlns:a="http://schemas.openxmlformats.org/drawingml/2006/main" prst="ellipse">
+                <a16:creationId xmlns:a16="http://schemas.microsoft.com/office/drawing/2014/main" id="{21F3F53D-BBB0-48D0-BD9E-BF27283528A8}"/>
+              </a:ext>
+            </a:extLst>
+          </p:cNvPr>
+          <p:cNvSpPr>
+            <a:spLocks xmlns:a="http://schemas.openxmlformats.org/drawingml/2006/main" noGrp="1"/>
+          </p:cNvSpPr>
+          <p:nvPr/>
+        </p:nvSpPr>
+        <p:spPr>
+          <a:xfrm xmlns:a="http://schemas.openxmlformats.org/drawingml/2006/main">
+            <a:off x="971550" y="2124075"/>
+            <a:ext cx="38100" cy="3524250"/>
+          </a:xfrm>
+          <a:prstGeom xmlns:a="http://schemas.openxmlformats.org/drawingml/2006/main" prst="rect">
             <a:avLst/>
           </a:prstGeom>
           <a:solidFill xmlns:a="http://schemas.openxmlformats.org/drawingml/2006/main">
-            <a:srgbClr val="18324A"/>
+            <a:srgbClr val="2C6E73"/>
           </a:solidFill>
           <a:ln xmlns:a="http://schemas.openxmlformats.org/drawingml/2006/main" w="0">
-            <a:noFill/>
+            <a:solidFill>
+              <a:srgbClr val="2C6E73"/>
+            </a:solidFill>
           </a:ln>
         </p:spPr>
       </p:sp>
@@ -8297,19 +8299,19 @@
           <p:cNvPr id="12" name="">
             <a:extLst xmlns:a="http://schemas.openxmlformats.org/drawingml/2006/main">
               <a:ext uri="{FF2B5EF4-FFF2-40B4-BE49-F238E27FC236}">
-                <a16:creationId xmlns:a16="http://schemas.microsoft.com/office/drawing/2014/main" id="{5E5A1599-FF9B-47C7-929E-5924D3FDCD8A}"/>
-              </a:ext>
-            </a:extLst>
-          </p:cNvPr>
-          <p:cNvSpPr>
-            <a:spLocks xmlns:a="http://schemas.openxmlformats.org/drawingml/2006/main" noGrp="1"/>
-          </p:cNvSpPr>
-          <p:nvPr/>
-        </p:nvSpPr>
-        <p:spPr>
-          <a:xfrm xmlns:a="http://schemas.openxmlformats.org/drawingml/2006/main">
-            <a:off x="1000125" y="2276475"/>
-            <a:ext cx="476250" cy="419100"/>
+                <a16:creationId xmlns:a16="http://schemas.microsoft.com/office/drawing/2014/main" id="{6208455D-DFCD-4A43-8DAC-A48793FC4D36}"/>
+              </a:ext>
+            </a:extLst>
+          </p:cNvPr>
+          <p:cNvSpPr>
+            <a:spLocks xmlns:a="http://schemas.openxmlformats.org/drawingml/2006/main" noGrp="1"/>
+          </p:cNvSpPr>
+          <p:nvPr/>
+        </p:nvSpPr>
+        <p:spPr>
+          <a:xfrm xmlns:a="http://schemas.openxmlformats.org/drawingml/2006/main">
+            <a:off x="1162050" y="2200275"/>
+            <a:ext cx="400050" cy="400050"/>
           </a:xfrm>
           <a:prstGeom xmlns:a="http://schemas.openxmlformats.org/drawingml/2006/main" prst="rect">
             <a:avLst/>
@@ -8326,9 +8328,9 @@
           <a:lstStyle xmlns:a="http://schemas.openxmlformats.org/drawingml/2006/main"/>
           <a:p xmlns:a="http://schemas.openxmlformats.org/drawingml/2006/main">
             <a:pPr algn="ctr">
-              <a:defRPr sz="1350" b="1">
-                <a:solidFill>
-                  <a:srgbClr val="FFFFFF"/>
+              <a:defRPr sz="1125" b="1">
+                <a:solidFill>
+                  <a:srgbClr val="2C6E73"/>
                 </a:solidFill>
                 <a:latin typeface="Arial"/>
                 <a:ea typeface="Arial"/>
@@ -8336,9 +8338,9 @@
               </a:defRPr>
             </a:pPr>
             <a:r>
-              <a:rPr sz="1350" b="1">
-                <a:solidFill>
-                  <a:srgbClr val="FFFFFF"/>
+              <a:rPr sz="1125" b="1">
+                <a:solidFill>
+                  <a:srgbClr val="2C6E73"/>
                 </a:solidFill>
                 <a:latin typeface="Arial"/>
                 <a:ea typeface="Arial"/>
@@ -8354,19 +8356,19 @@
           <p:cNvPr id="13" name="">
             <a:extLst xmlns:a="http://schemas.openxmlformats.org/drawingml/2006/main">
               <a:ext uri="{FF2B5EF4-FFF2-40B4-BE49-F238E27FC236}">
-                <a16:creationId xmlns:a16="http://schemas.microsoft.com/office/drawing/2014/main" id="{6D1B85E4-A970-4CA7-8FE1-67DEC78D24E4}"/>
-              </a:ext>
-            </a:extLst>
-          </p:cNvPr>
-          <p:cNvSpPr>
-            <a:spLocks xmlns:a="http://schemas.openxmlformats.org/drawingml/2006/main" noGrp="1"/>
-          </p:cNvSpPr>
-          <p:nvPr/>
-        </p:nvSpPr>
-        <p:spPr>
-          <a:xfrm xmlns:a="http://schemas.openxmlformats.org/drawingml/2006/main">
-            <a:off x="1714500" y="2181225"/>
-            <a:ext cx="9429750" cy="609600"/>
+                <a16:creationId xmlns:a16="http://schemas.microsoft.com/office/drawing/2014/main" id="{F800B810-9158-494E-838D-4B1A9D6F4E93}"/>
+              </a:ext>
+            </a:extLst>
+          </p:cNvPr>
+          <p:cNvSpPr>
+            <a:spLocks xmlns:a="http://schemas.openxmlformats.org/drawingml/2006/main" noGrp="1"/>
+          </p:cNvSpPr>
+          <p:nvPr/>
+        </p:nvSpPr>
+        <p:spPr>
+          <a:xfrm xmlns:a="http://schemas.openxmlformats.org/drawingml/2006/main">
+            <a:off x="1714500" y="2114550"/>
+            <a:ext cx="9525000" cy="809625"/>
           </a:xfrm>
           <a:prstGeom xmlns:a="http://schemas.openxmlformats.org/drawingml/2006/main" prst="rect">
             <a:avLst/>
@@ -8383,7 +8385,7 @@
           <a:lstStyle xmlns:a="http://schemas.openxmlformats.org/drawingml/2006/main"/>
           <a:p xmlns:a="http://schemas.openxmlformats.org/drawingml/2006/main">
             <a:pPr algn="l">
-              <a:defRPr sz="1500" b="0">
+              <a:defRPr sz="1725" b="0">
                 <a:solidFill>
                   <a:srgbClr val="17253A"/>
                 </a:solidFill>
@@ -8393,7 +8395,7 @@
               </a:defRPr>
             </a:pPr>
             <a:r>
-              <a:rPr sz="1500" b="0">
+              <a:rPr sz="1725" b="0">
                 <a:solidFill>
                   <a:srgbClr val="17253A"/>
                 </a:solidFill>
@@ -8401,7 +8403,7 @@
                 <a:ea typeface="Arial"/>
                 <a:cs typeface="Arial"/>
               </a:rPr>
-              <a:t>Identify the structure: Identify the required measure and mark the relevant lengths.</a:t>
+              <a:t>Parallelogram base = 12 cm, perpendicular height = 7 cm</a:t>
             </a:r>
           </a:p>
         </p:txBody>
@@ -8411,28 +8413,30 @@
           <p:cNvPr id="14" name="">
             <a:extLst xmlns:a="http://schemas.openxmlformats.org/drawingml/2006/main">
               <a:ext uri="{FF2B5EF4-FFF2-40B4-BE49-F238E27FC236}">
-                <a16:creationId xmlns:a16="http://schemas.microsoft.com/office/drawing/2014/main" id="{EC7E7830-8838-4E59-A44F-4C7A6F64BEEF}"/>
-              </a:ext>
-            </a:extLst>
-          </p:cNvPr>
-          <p:cNvSpPr>
-            <a:spLocks xmlns:a="http://schemas.openxmlformats.org/drawingml/2006/main" noGrp="1"/>
-          </p:cNvSpPr>
-          <p:nvPr/>
-        </p:nvSpPr>
-        <p:spPr>
-          <a:xfrm xmlns:a="http://schemas.openxmlformats.org/drawingml/2006/main">
-            <a:off x="1000125" y="2990850"/>
-            <a:ext cx="476250" cy="476250"/>
-          </a:xfrm>
-          <a:prstGeom xmlns:a="http://schemas.openxmlformats.org/drawingml/2006/main" prst="ellipse">
+                <a16:creationId xmlns:a16="http://schemas.microsoft.com/office/drawing/2014/main" id="{A95BAE08-8286-4C14-94F0-9592410698F6}"/>
+              </a:ext>
+            </a:extLst>
+          </p:cNvPr>
+          <p:cNvSpPr>
+            <a:spLocks xmlns:a="http://schemas.openxmlformats.org/drawingml/2006/main" noGrp="1"/>
+          </p:cNvSpPr>
+          <p:nvPr/>
+        </p:nvSpPr>
+        <p:spPr>
+          <a:xfrm xmlns:a="http://schemas.openxmlformats.org/drawingml/2006/main">
+            <a:off x="1714500" y="2943225"/>
+            <a:ext cx="9334500" cy="9525"/>
+          </a:xfrm>
+          <a:prstGeom xmlns:a="http://schemas.openxmlformats.org/drawingml/2006/main" prst="rect">
             <a:avLst/>
           </a:prstGeom>
           <a:solidFill xmlns:a="http://schemas.openxmlformats.org/drawingml/2006/main">
-            <a:srgbClr val="2C6E73"/>
+            <a:srgbClr val="D9E0E6"/>
           </a:solidFill>
           <a:ln xmlns:a="http://schemas.openxmlformats.org/drawingml/2006/main" w="0">
-            <a:noFill/>
+            <a:solidFill>
+              <a:srgbClr val="D9E0E6"/>
+            </a:solidFill>
           </a:ln>
         </p:spPr>
       </p:sp>
@@ -8441,19 +8445,19 @@
           <p:cNvPr id="15" name="">
             <a:extLst xmlns:a="http://schemas.openxmlformats.org/drawingml/2006/main">
               <a:ext uri="{FF2B5EF4-FFF2-40B4-BE49-F238E27FC236}">
-                <a16:creationId xmlns:a16="http://schemas.microsoft.com/office/drawing/2014/main" id="{E17CAF28-C1C5-4AAE-8BCD-065595B7D91B}"/>
-              </a:ext>
-            </a:extLst>
-          </p:cNvPr>
-          <p:cNvSpPr>
-            <a:spLocks xmlns:a="http://schemas.openxmlformats.org/drawingml/2006/main" noGrp="1"/>
-          </p:cNvSpPr>
-          <p:nvPr/>
-        </p:nvSpPr>
-        <p:spPr>
-          <a:xfrm xmlns:a="http://schemas.openxmlformats.org/drawingml/2006/main">
-            <a:off x="1000125" y="3019425"/>
-            <a:ext cx="476250" cy="419100"/>
+                <a16:creationId xmlns:a16="http://schemas.microsoft.com/office/drawing/2014/main" id="{DE5D231E-E410-4532-A0AC-6D05927A9F0E}"/>
+              </a:ext>
+            </a:extLst>
+          </p:cNvPr>
+          <p:cNvSpPr>
+            <a:spLocks xmlns:a="http://schemas.openxmlformats.org/drawingml/2006/main" noGrp="1"/>
+          </p:cNvSpPr>
+          <p:nvPr/>
+        </p:nvSpPr>
+        <p:spPr>
+          <a:xfrm xmlns:a="http://schemas.openxmlformats.org/drawingml/2006/main">
+            <a:off x="1162050" y="3076575"/>
+            <a:ext cx="400050" cy="400050"/>
           </a:xfrm>
           <a:prstGeom xmlns:a="http://schemas.openxmlformats.org/drawingml/2006/main" prst="rect">
             <a:avLst/>
@@ -8470,9 +8474,9 @@
           <a:lstStyle xmlns:a="http://schemas.openxmlformats.org/drawingml/2006/main"/>
           <a:p xmlns:a="http://schemas.openxmlformats.org/drawingml/2006/main">
             <a:pPr algn="ctr">
-              <a:defRPr sz="1350" b="1">
-                <a:solidFill>
-                  <a:srgbClr val="FFFFFF"/>
+              <a:defRPr sz="1125" b="1">
+                <a:solidFill>
+                  <a:srgbClr val="2C6E73"/>
                 </a:solidFill>
                 <a:latin typeface="Arial"/>
                 <a:ea typeface="Arial"/>
@@ -8480,9 +8484,9 @@
               </a:defRPr>
             </a:pPr>
             <a:r>
-              <a:rPr sz="1350" b="1">
-                <a:solidFill>
-                  <a:srgbClr val="FFFFFF"/>
+              <a:rPr sz="1125" b="1">
+                <a:solidFill>
+                  <a:srgbClr val="2C6E73"/>
                 </a:solidFill>
                 <a:latin typeface="Arial"/>
                 <a:ea typeface="Arial"/>
@@ -8498,19 +8502,19 @@
           <p:cNvPr id="16" name="">
             <a:extLst xmlns:a="http://schemas.openxmlformats.org/drawingml/2006/main">
               <a:ext uri="{FF2B5EF4-FFF2-40B4-BE49-F238E27FC236}">
-                <a16:creationId xmlns:a16="http://schemas.microsoft.com/office/drawing/2014/main" id="{6B71B8D2-7655-4B1A-BE43-6A3E7D83170C}"/>
-              </a:ext>
-            </a:extLst>
-          </p:cNvPr>
-          <p:cNvSpPr>
-            <a:spLocks xmlns:a="http://schemas.openxmlformats.org/drawingml/2006/main" noGrp="1"/>
-          </p:cNvSpPr>
-          <p:nvPr/>
-        </p:nvSpPr>
-        <p:spPr>
-          <a:xfrm xmlns:a="http://schemas.openxmlformats.org/drawingml/2006/main">
-            <a:off x="1714500" y="2924175"/>
-            <a:ext cx="9429750" cy="609600"/>
+                <a16:creationId xmlns:a16="http://schemas.microsoft.com/office/drawing/2014/main" id="{7A5E7604-FAE4-4436-9417-2ABA2741484C}"/>
+              </a:ext>
+            </a:extLst>
+          </p:cNvPr>
+          <p:cNvSpPr>
+            <a:spLocks xmlns:a="http://schemas.openxmlformats.org/drawingml/2006/main" noGrp="1"/>
+          </p:cNvSpPr>
+          <p:nvPr/>
+        </p:nvSpPr>
+        <p:spPr>
+          <a:xfrm xmlns:a="http://schemas.openxmlformats.org/drawingml/2006/main">
+            <a:off x="1714500" y="2990850"/>
+            <a:ext cx="9525000" cy="809625"/>
           </a:xfrm>
           <a:prstGeom xmlns:a="http://schemas.openxmlformats.org/drawingml/2006/main" prst="rect">
             <a:avLst/>
@@ -8527,7 +8531,7 @@
           <a:lstStyle xmlns:a="http://schemas.openxmlformats.org/drawingml/2006/main"/>
           <a:p xmlns:a="http://schemas.openxmlformats.org/drawingml/2006/main">
             <a:pPr algn="l">
-              <a:defRPr sz="1500" b="0">
+              <a:defRPr sz="1725" b="0">
                 <a:solidFill>
                   <a:srgbClr val="17253A"/>
                 </a:solidFill>
@@ -8537,7 +8541,7 @@
               </a:defRPr>
             </a:pPr>
             <a:r>
-              <a:rPr sz="1500" b="0">
+              <a:rPr sz="1725" b="0">
                 <a:solidFill>
                   <a:srgbClr val="17253A"/>
                 </a:solidFill>
@@ -8545,7 +8549,7 @@
                 <a:ea typeface="Arial"/>
                 <a:cs typeface="Arial"/>
               </a:rPr>
-              <a:t>Set up the method: Use the perpendicular height, not a sloping side, in the area formula.</a:t>
+              <a:t>Area = base × perpendicular height</a:t>
             </a:r>
           </a:p>
         </p:txBody>
@@ -8555,28 +8559,30 @@
           <p:cNvPr id="17" name="">
             <a:extLst xmlns:a="http://schemas.openxmlformats.org/drawingml/2006/main">
               <a:ext uri="{FF2B5EF4-FFF2-40B4-BE49-F238E27FC236}">
-                <a16:creationId xmlns:a16="http://schemas.microsoft.com/office/drawing/2014/main" id="{B921AC47-16B2-40F9-8EE6-7B38A23771A3}"/>
-              </a:ext>
-            </a:extLst>
-          </p:cNvPr>
-          <p:cNvSpPr>
-            <a:spLocks xmlns:a="http://schemas.openxmlformats.org/drawingml/2006/main" noGrp="1"/>
-          </p:cNvSpPr>
-          <p:nvPr/>
-        </p:nvSpPr>
-        <p:spPr>
-          <a:xfrm xmlns:a="http://schemas.openxmlformats.org/drawingml/2006/main">
-            <a:off x="1000125" y="3733800"/>
-            <a:ext cx="476250" cy="476250"/>
-          </a:xfrm>
-          <a:prstGeom xmlns:a="http://schemas.openxmlformats.org/drawingml/2006/main" prst="ellipse">
+                <a16:creationId xmlns:a16="http://schemas.microsoft.com/office/drawing/2014/main" id="{D4091BAE-2554-4DBA-A454-9CDC560D54D2}"/>
+              </a:ext>
+            </a:extLst>
+          </p:cNvPr>
+          <p:cNvSpPr>
+            <a:spLocks xmlns:a="http://schemas.openxmlformats.org/drawingml/2006/main" noGrp="1"/>
+          </p:cNvSpPr>
+          <p:nvPr/>
+        </p:nvSpPr>
+        <p:spPr>
+          <a:xfrm xmlns:a="http://schemas.openxmlformats.org/drawingml/2006/main">
+            <a:off x="1714500" y="3819525"/>
+            <a:ext cx="9334500" cy="9525"/>
+          </a:xfrm>
+          <a:prstGeom xmlns:a="http://schemas.openxmlformats.org/drawingml/2006/main" prst="rect">
             <a:avLst/>
           </a:prstGeom>
           <a:solidFill xmlns:a="http://schemas.openxmlformats.org/drawingml/2006/main">
-            <a:srgbClr val="2C6E73"/>
+            <a:srgbClr val="D9E0E6"/>
           </a:solidFill>
           <a:ln xmlns:a="http://schemas.openxmlformats.org/drawingml/2006/main" w="0">
-            <a:noFill/>
+            <a:solidFill>
+              <a:srgbClr val="D9E0E6"/>
+            </a:solidFill>
           </a:ln>
         </p:spPr>
       </p:sp>
@@ -8585,19 +8591,19 @@
           <p:cNvPr id="18" name="">
             <a:extLst xmlns:a="http://schemas.openxmlformats.org/drawingml/2006/main">
               <a:ext uri="{FF2B5EF4-FFF2-40B4-BE49-F238E27FC236}">
-                <a16:creationId xmlns:a16="http://schemas.microsoft.com/office/drawing/2014/main" id="{196D7FAA-FC38-47BF-B14E-913ED023776C}"/>
-              </a:ext>
-            </a:extLst>
-          </p:cNvPr>
-          <p:cNvSpPr>
-            <a:spLocks xmlns:a="http://schemas.openxmlformats.org/drawingml/2006/main" noGrp="1"/>
-          </p:cNvSpPr>
-          <p:nvPr/>
-        </p:nvSpPr>
-        <p:spPr>
-          <a:xfrm xmlns:a="http://schemas.openxmlformats.org/drawingml/2006/main">
-            <a:off x="1000125" y="3762375"/>
-            <a:ext cx="476250" cy="419100"/>
+                <a16:creationId xmlns:a16="http://schemas.microsoft.com/office/drawing/2014/main" id="{5E44215D-DA69-468C-B7AD-B42EDDC43CCF}"/>
+              </a:ext>
+            </a:extLst>
+          </p:cNvPr>
+          <p:cNvSpPr>
+            <a:spLocks xmlns:a="http://schemas.openxmlformats.org/drawingml/2006/main" noGrp="1"/>
+          </p:cNvSpPr>
+          <p:nvPr/>
+        </p:nvSpPr>
+        <p:spPr>
+          <a:xfrm xmlns:a="http://schemas.openxmlformats.org/drawingml/2006/main">
+            <a:off x="1162050" y="3952875"/>
+            <a:ext cx="400050" cy="400050"/>
           </a:xfrm>
           <a:prstGeom xmlns:a="http://schemas.openxmlformats.org/drawingml/2006/main" prst="rect">
             <a:avLst/>
@@ -8614,9 +8620,9 @@
           <a:lstStyle xmlns:a="http://schemas.openxmlformats.org/drawingml/2006/main"/>
           <a:p xmlns:a="http://schemas.openxmlformats.org/drawingml/2006/main">
             <a:pPr algn="ctr">
-              <a:defRPr sz="1350" b="1">
-                <a:solidFill>
-                  <a:srgbClr val="FFFFFF"/>
+              <a:defRPr sz="1125" b="1">
+                <a:solidFill>
+                  <a:srgbClr val="2C6E73"/>
                 </a:solidFill>
                 <a:latin typeface="Arial"/>
                 <a:ea typeface="Arial"/>
@@ -8624,9 +8630,9 @@
               </a:defRPr>
             </a:pPr>
             <a:r>
-              <a:rPr sz="1350" b="1">
-                <a:solidFill>
-                  <a:srgbClr val="FFFFFF"/>
+              <a:rPr sz="1125" b="1">
+                <a:solidFill>
+                  <a:srgbClr val="2C6E73"/>
                 </a:solidFill>
                 <a:latin typeface="Arial"/>
                 <a:ea typeface="Arial"/>
@@ -8642,19 +8648,19 @@
           <p:cNvPr id="19" name="">
             <a:extLst xmlns:a="http://schemas.openxmlformats.org/drawingml/2006/main">
               <a:ext uri="{FF2B5EF4-FFF2-40B4-BE49-F238E27FC236}">
-                <a16:creationId xmlns:a16="http://schemas.microsoft.com/office/drawing/2014/main" id="{E9AC7EAE-4EF8-49F0-828A-DFEEC1677C1F}"/>
-              </a:ext>
-            </a:extLst>
-          </p:cNvPr>
-          <p:cNvSpPr>
-            <a:spLocks xmlns:a="http://schemas.openxmlformats.org/drawingml/2006/main" noGrp="1"/>
-          </p:cNvSpPr>
-          <p:nvPr/>
-        </p:nvSpPr>
-        <p:spPr>
-          <a:xfrm xmlns:a="http://schemas.openxmlformats.org/drawingml/2006/main">
-            <a:off x="1714500" y="3667125"/>
-            <a:ext cx="9429750" cy="609600"/>
+                <a16:creationId xmlns:a16="http://schemas.microsoft.com/office/drawing/2014/main" id="{E0DD3D07-E197-4B88-9EEF-EBDC609BF23E}"/>
+              </a:ext>
+            </a:extLst>
+          </p:cNvPr>
+          <p:cNvSpPr>
+            <a:spLocks xmlns:a="http://schemas.openxmlformats.org/drawingml/2006/main" noGrp="1"/>
+          </p:cNvSpPr>
+          <p:nvPr/>
+        </p:nvSpPr>
+        <p:spPr>
+          <a:xfrm xmlns:a="http://schemas.openxmlformats.org/drawingml/2006/main">
+            <a:off x="1714500" y="3867150"/>
+            <a:ext cx="9525000" cy="809625"/>
           </a:xfrm>
           <a:prstGeom xmlns:a="http://schemas.openxmlformats.org/drawingml/2006/main" prst="rect">
             <a:avLst/>
@@ -8671,7 +8677,7 @@
           <a:lstStyle xmlns:a="http://schemas.openxmlformats.org/drawingml/2006/main"/>
           <a:p xmlns:a="http://schemas.openxmlformats.org/drawingml/2006/main">
             <a:pPr algn="l">
-              <a:defRPr sz="1500" b="0">
+              <a:defRPr sz="1725" b="0">
                 <a:solidFill>
                   <a:srgbClr val="17253A"/>
                 </a:solidFill>
@@ -8681,7 +8687,7 @@
               </a:defRPr>
             </a:pPr>
             <a:r>
-              <a:rPr sz="1500" b="0">
+              <a:rPr sz="1725" b="0">
                 <a:solidFill>
                   <a:srgbClr val="17253A"/>
                 </a:solidFill>
@@ -8689,7 +8695,7 @@
                 <a:ea typeface="Arial"/>
                 <a:cs typeface="Arial"/>
               </a:rPr>
-              <a:t>Complete the calculation: 84 cm2.</a:t>
+              <a:t>Area = 12 × 7</a:t>
             </a:r>
           </a:p>
         </p:txBody>
@@ -8699,28 +8705,30 @@
           <p:cNvPr id="20" name="">
             <a:extLst xmlns:a="http://schemas.openxmlformats.org/drawingml/2006/main">
               <a:ext uri="{FF2B5EF4-FFF2-40B4-BE49-F238E27FC236}">
-                <a16:creationId xmlns:a16="http://schemas.microsoft.com/office/drawing/2014/main" id="{B9AB1D6B-C1AE-4DE5-980F-9667596FBF06}"/>
-              </a:ext>
-            </a:extLst>
-          </p:cNvPr>
-          <p:cNvSpPr>
-            <a:spLocks xmlns:a="http://schemas.openxmlformats.org/drawingml/2006/main" noGrp="1"/>
-          </p:cNvSpPr>
-          <p:nvPr/>
-        </p:nvSpPr>
-        <p:spPr>
-          <a:xfrm xmlns:a="http://schemas.openxmlformats.org/drawingml/2006/main">
-            <a:off x="1000125" y="4476750"/>
-            <a:ext cx="476250" cy="476250"/>
-          </a:xfrm>
-          <a:prstGeom xmlns:a="http://schemas.openxmlformats.org/drawingml/2006/main" prst="ellipse">
+                <a16:creationId xmlns:a16="http://schemas.microsoft.com/office/drawing/2014/main" id="{F8AB021E-3731-4D17-802A-6B229968DECB}"/>
+              </a:ext>
+            </a:extLst>
+          </p:cNvPr>
+          <p:cNvSpPr>
+            <a:spLocks xmlns:a="http://schemas.openxmlformats.org/drawingml/2006/main" noGrp="1"/>
+          </p:cNvSpPr>
+          <p:nvPr/>
+        </p:nvSpPr>
+        <p:spPr>
+          <a:xfrm xmlns:a="http://schemas.openxmlformats.org/drawingml/2006/main">
+            <a:off x="1714500" y="4695825"/>
+            <a:ext cx="9334500" cy="9525"/>
+          </a:xfrm>
+          <a:prstGeom xmlns:a="http://schemas.openxmlformats.org/drawingml/2006/main" prst="rect">
             <a:avLst/>
           </a:prstGeom>
           <a:solidFill xmlns:a="http://schemas.openxmlformats.org/drawingml/2006/main">
-            <a:srgbClr val="2C6E73"/>
+            <a:srgbClr val="D9E0E6"/>
           </a:solidFill>
           <a:ln xmlns:a="http://schemas.openxmlformats.org/drawingml/2006/main" w="0">
-            <a:noFill/>
+            <a:solidFill>
+              <a:srgbClr val="D9E0E6"/>
+            </a:solidFill>
           </a:ln>
         </p:spPr>
       </p:sp>
@@ -8729,19 +8737,19 @@
           <p:cNvPr id="21" name="">
             <a:extLst xmlns:a="http://schemas.openxmlformats.org/drawingml/2006/main">
               <a:ext uri="{FF2B5EF4-FFF2-40B4-BE49-F238E27FC236}">
-                <a16:creationId xmlns:a16="http://schemas.microsoft.com/office/drawing/2014/main" id="{4EE2AC13-40B3-4334-88C1-B00483DA93C1}"/>
-              </a:ext>
-            </a:extLst>
-          </p:cNvPr>
-          <p:cNvSpPr>
-            <a:spLocks xmlns:a="http://schemas.openxmlformats.org/drawingml/2006/main" noGrp="1"/>
-          </p:cNvSpPr>
-          <p:nvPr/>
-        </p:nvSpPr>
-        <p:spPr>
-          <a:xfrm xmlns:a="http://schemas.openxmlformats.org/drawingml/2006/main">
-            <a:off x="1000125" y="4505325"/>
-            <a:ext cx="476250" cy="419100"/>
+                <a16:creationId xmlns:a16="http://schemas.microsoft.com/office/drawing/2014/main" id="{77459D5F-CD80-4094-B401-41B65EAA5457}"/>
+              </a:ext>
+            </a:extLst>
+          </p:cNvPr>
+          <p:cNvSpPr>
+            <a:spLocks xmlns:a="http://schemas.openxmlformats.org/drawingml/2006/main" noGrp="1"/>
+          </p:cNvSpPr>
+          <p:nvPr/>
+        </p:nvSpPr>
+        <p:spPr>
+          <a:xfrm xmlns:a="http://schemas.openxmlformats.org/drawingml/2006/main">
+            <a:off x="1162050" y="4829175"/>
+            <a:ext cx="400050" cy="400050"/>
           </a:xfrm>
           <a:prstGeom xmlns:a="http://schemas.openxmlformats.org/drawingml/2006/main" prst="rect">
             <a:avLst/>
@@ -8758,9 +8766,9 @@
           <a:lstStyle xmlns:a="http://schemas.openxmlformats.org/drawingml/2006/main"/>
           <a:p xmlns:a="http://schemas.openxmlformats.org/drawingml/2006/main">
             <a:pPr algn="ctr">
-              <a:defRPr sz="1350" b="1">
-                <a:solidFill>
-                  <a:srgbClr val="FFFFFF"/>
+              <a:defRPr sz="1125" b="1">
+                <a:solidFill>
+                  <a:srgbClr val="2F785D"/>
                 </a:solidFill>
                 <a:latin typeface="Arial"/>
                 <a:ea typeface="Arial"/>
@@ -8768,9 +8776,9 @@
               </a:defRPr>
             </a:pPr>
             <a:r>
-              <a:rPr sz="1350" b="1">
-                <a:solidFill>
-                  <a:srgbClr val="FFFFFF"/>
+              <a:rPr sz="1125" b="1">
+                <a:solidFill>
+                  <a:srgbClr val="2F785D"/>
                 </a:solidFill>
                 <a:latin typeface="Arial"/>
                 <a:ea typeface="Arial"/>
@@ -8786,19 +8794,19 @@
           <p:cNvPr id="22" name="">
             <a:extLst xmlns:a="http://schemas.openxmlformats.org/drawingml/2006/main">
               <a:ext uri="{FF2B5EF4-FFF2-40B4-BE49-F238E27FC236}">
-                <a16:creationId xmlns:a16="http://schemas.microsoft.com/office/drawing/2014/main" id="{F2EAD6F8-B482-4B6D-BE76-30A3094FB859}"/>
-              </a:ext>
-            </a:extLst>
-          </p:cNvPr>
-          <p:cNvSpPr>
-            <a:spLocks xmlns:a="http://schemas.openxmlformats.org/drawingml/2006/main" noGrp="1"/>
-          </p:cNvSpPr>
-          <p:nvPr/>
-        </p:nvSpPr>
-        <p:spPr>
-          <a:xfrm xmlns:a="http://schemas.openxmlformats.org/drawingml/2006/main">
-            <a:off x="1714500" y="4410075"/>
-            <a:ext cx="9429750" cy="609600"/>
+                <a16:creationId xmlns:a16="http://schemas.microsoft.com/office/drawing/2014/main" id="{70DF2D2C-DF29-45D1-9F5C-5699B3DDE00E}"/>
+              </a:ext>
+            </a:extLst>
+          </p:cNvPr>
+          <p:cNvSpPr>
+            <a:spLocks xmlns:a="http://schemas.openxmlformats.org/drawingml/2006/main" noGrp="1"/>
+          </p:cNvSpPr>
+          <p:nvPr/>
+        </p:nvSpPr>
+        <p:spPr>
+          <a:xfrm xmlns:a="http://schemas.openxmlformats.org/drawingml/2006/main">
+            <a:off x="1714500" y="4743450"/>
+            <a:ext cx="9525000" cy="809625"/>
           </a:xfrm>
           <a:prstGeom xmlns:a="http://schemas.openxmlformats.org/drawingml/2006/main" prst="rect">
             <a:avLst/>
@@ -8815,7 +8823,7 @@
           <a:lstStyle xmlns:a="http://schemas.openxmlformats.org/drawingml/2006/main"/>
           <a:p xmlns:a="http://schemas.openxmlformats.org/drawingml/2006/main">
             <a:pPr algn="l">
-              <a:defRPr sz="1500" b="1">
+              <a:defRPr sz="1725" b="1">
                 <a:solidFill>
                   <a:srgbClr val="2F785D"/>
                 </a:solidFill>
@@ -8825,7 +8833,7 @@
               </a:defRPr>
             </a:pPr>
             <a:r>
-              <a:rPr sz="1500" b="1">
+              <a:rPr sz="1725" b="1">
                 <a:solidFill>
                   <a:srgbClr val="2F785D"/>
                 </a:solidFill>
@@ -8833,7 +8841,7 @@
                 <a:ea typeface="Arial"/>
                 <a:cs typeface="Arial"/>
               </a:rPr>
-              <a:t>Check the result: Include squared units for area and check by decomposition.</a:t>
+              <a:t>84 cm²</a:t>
             </a:r>
           </a:p>
         </p:txBody>
@@ -8841,7 +8849,7 @@
     </p:spTree>
     <p:extLst>
       <p:ext uri="{BB962C8B-B14F-4D97-AF65-F5344CB8AC3E}">
-        <p14:creationId xmlns:p14="http://schemas.microsoft.com/office/powerpoint/2010/main" val="1603033903"/>
+        <p14:creationId xmlns:p14="http://schemas.microsoft.com/office/powerpoint/2010/main" val="212292560"/>
       </p:ext>
     </p:extLst>
   </p:cSld>
@@ -9134,7 +9142,7 @@
           <p:cNvPr id="15" name="">
             <a:extLst xmlns:a="http://schemas.openxmlformats.org/drawingml/2006/main">
               <a:ext uri="{FF2B5EF4-FFF2-40B4-BE49-F238E27FC236}">
-                <a16:creationId xmlns:a16="http://schemas.microsoft.com/office/drawing/2014/main" id="{D4520048-88C8-45A8-8C33-9F305C9B1295}"/>
+                <a16:creationId xmlns:a16="http://schemas.microsoft.com/office/drawing/2014/main" id="{85064B33-3D07-4BA0-B270-1E5F98B86346}"/>
               </a:ext>
             </a:extLst>
           </p:cNvPr>
@@ -9166,7 +9174,7 @@
           <p:cNvPr id="2" name="">
             <a:extLst xmlns:a="http://schemas.openxmlformats.org/drawingml/2006/main">
               <a:ext uri="{FF2B5EF4-FFF2-40B4-BE49-F238E27FC236}">
-                <a16:creationId xmlns:a16="http://schemas.microsoft.com/office/drawing/2014/main" id="{019B1DD0-904A-47A2-B186-1781781113D5}"/>
+                <a16:creationId xmlns:a16="http://schemas.microsoft.com/office/drawing/2014/main" id="{B6CF821B-8D09-4646-A7DC-15A3D923E78A}"/>
               </a:ext>
             </a:extLst>
           </p:cNvPr>
@@ -9223,7 +9231,7 @@
           <p:cNvPr id="3" name="">
             <a:extLst xmlns:a="http://schemas.openxmlformats.org/drawingml/2006/main">
               <a:ext uri="{FF2B5EF4-FFF2-40B4-BE49-F238E27FC236}">
-                <a16:creationId xmlns:a16="http://schemas.microsoft.com/office/drawing/2014/main" id="{DB317EF4-7404-4014-A971-DDB0A053C10A}"/>
+                <a16:creationId xmlns:a16="http://schemas.microsoft.com/office/drawing/2014/main" id="{44527637-AB42-48D9-98E0-58086D18055D}"/>
               </a:ext>
             </a:extLst>
           </p:cNvPr>
@@ -9255,7 +9263,7 @@
           <p:cNvPr id="4" name="">
             <a:extLst xmlns:a="http://schemas.openxmlformats.org/drawingml/2006/main">
               <a:ext uri="{FF2B5EF4-FFF2-40B4-BE49-F238E27FC236}">
-                <a16:creationId xmlns:a16="http://schemas.microsoft.com/office/drawing/2014/main" id="{288CD8DF-D0D6-44B3-A895-3ED0654FD08E}"/>
+                <a16:creationId xmlns:a16="http://schemas.microsoft.com/office/drawing/2014/main" id="{7CC60674-C2E0-42B8-9205-6156FD3E4BDA}"/>
               </a:ext>
             </a:extLst>
           </p:cNvPr>
@@ -9312,7 +9320,7 @@
           <p:cNvPr id="5" name="">
             <a:extLst xmlns:a="http://schemas.openxmlformats.org/drawingml/2006/main">
               <a:ext uri="{FF2B5EF4-FFF2-40B4-BE49-F238E27FC236}">
-                <a16:creationId xmlns:a16="http://schemas.microsoft.com/office/drawing/2014/main" id="{DDAA9E2C-D8F7-4A14-A16D-F8B74F8CE942}"/>
+                <a16:creationId xmlns:a16="http://schemas.microsoft.com/office/drawing/2014/main" id="{4AC3CA28-AB42-4C08-83E2-6C8942EC1A85}"/>
               </a:ext>
             </a:extLst>
           </p:cNvPr>
@@ -9369,7 +9377,7 @@
           <p:cNvPr id="6" name="">
             <a:extLst xmlns:a="http://schemas.openxmlformats.org/drawingml/2006/main">
               <a:ext uri="{FF2B5EF4-FFF2-40B4-BE49-F238E27FC236}">
-                <a16:creationId xmlns:a16="http://schemas.microsoft.com/office/drawing/2014/main" id="{4BFE1F87-E5C3-4564-9C1F-B168159D255A}"/>
+                <a16:creationId xmlns:a16="http://schemas.microsoft.com/office/drawing/2014/main" id="{A7E9A90B-6FB5-4E7F-8517-E22A45A96AB8}"/>
               </a:ext>
             </a:extLst>
           </p:cNvPr>
@@ -9426,7 +9434,7 @@
           <p:cNvPr id="7" name="">
             <a:extLst xmlns:a="http://schemas.openxmlformats.org/drawingml/2006/main">
               <a:ext uri="{FF2B5EF4-FFF2-40B4-BE49-F238E27FC236}">
-                <a16:creationId xmlns:a16="http://schemas.microsoft.com/office/drawing/2014/main" id="{029582AF-3874-491E-9F1B-92A586709F9C}"/>
+                <a16:creationId xmlns:a16="http://schemas.microsoft.com/office/drawing/2014/main" id="{5768F133-3DFB-41DF-B360-266793C48D17}"/>
               </a:ext>
             </a:extLst>
           </p:cNvPr>
@@ -9458,7 +9466,7 @@
           <p:cNvPr id="8" name="">
             <a:extLst xmlns:a="http://schemas.openxmlformats.org/drawingml/2006/main">
               <a:ext uri="{FF2B5EF4-FFF2-40B4-BE49-F238E27FC236}">
-                <a16:creationId xmlns:a16="http://schemas.microsoft.com/office/drawing/2014/main" id="{53934FC1-D437-4DCD-9B0F-FC6C173FB55A}"/>
+                <a16:creationId xmlns:a16="http://schemas.microsoft.com/office/drawing/2014/main" id="{A5B7210B-A9D8-47DB-896B-EC7131EDC6C3}"/>
               </a:ext>
             </a:extLst>
           </p:cNvPr>
@@ -9515,7 +9523,7 @@
           <p:cNvPr id="9" name="">
             <a:extLst xmlns:a="http://schemas.openxmlformats.org/drawingml/2006/main">
               <a:ext uri="{FF2B5EF4-FFF2-40B4-BE49-F238E27FC236}">
-                <a16:creationId xmlns:a16="http://schemas.microsoft.com/office/drawing/2014/main" id="{47E1CE9E-3C1F-4BF3-B1E1-46C50CF030EC}"/>
+                <a16:creationId xmlns:a16="http://schemas.microsoft.com/office/drawing/2014/main" id="{FB2DF3DB-5B2C-45DC-936F-8258FCFD6820}"/>
               </a:ext>
             </a:extLst>
           </p:cNvPr>
@@ -9572,7 +9580,7 @@
           <p:cNvPr id="10" name="">
             <a:extLst xmlns:a="http://schemas.openxmlformats.org/drawingml/2006/main">
               <a:ext uri="{FF2B5EF4-FFF2-40B4-BE49-F238E27FC236}">
-                <a16:creationId xmlns:a16="http://schemas.microsoft.com/office/drawing/2014/main" id="{9D132E79-CF9C-4BC0-BED8-F09A149C3FB5}"/>
+                <a16:creationId xmlns:a16="http://schemas.microsoft.com/office/drawing/2014/main" id="{AE22D201-58C8-403D-B90A-BA75C4E287E1}"/>
               </a:ext>
             </a:extLst>
           </p:cNvPr>
@@ -9629,7 +9637,7 @@
           <p:cNvPr id="11" name="">
             <a:extLst xmlns:a="http://schemas.openxmlformats.org/drawingml/2006/main">
               <a:ext uri="{FF2B5EF4-FFF2-40B4-BE49-F238E27FC236}">
-                <a16:creationId xmlns:a16="http://schemas.microsoft.com/office/drawing/2014/main" id="{35B5579E-9019-4B0B-AA8D-9744965CD6F8}"/>
+                <a16:creationId xmlns:a16="http://schemas.microsoft.com/office/drawing/2014/main" id="{9B0F6B09-777E-440F-9F21-D77CA6D7DB63}"/>
               </a:ext>
             </a:extLst>
           </p:cNvPr>
@@ -9686,7 +9694,7 @@
           <p:cNvPr id="12" name="">
             <a:extLst xmlns:a="http://schemas.openxmlformats.org/drawingml/2006/main">
               <a:ext uri="{FF2B5EF4-FFF2-40B4-BE49-F238E27FC236}">
-                <a16:creationId xmlns:a16="http://schemas.microsoft.com/office/drawing/2014/main" id="{C717704F-7298-4E34-B726-20C0928CCFD2}"/>
+                <a16:creationId xmlns:a16="http://schemas.microsoft.com/office/drawing/2014/main" id="{552410F1-6418-4C03-800C-9B129A656B0C}"/>
               </a:ext>
             </a:extLst>
           </p:cNvPr>
@@ -9718,7 +9726,7 @@
           <p:cNvPr id="13" name="">
             <a:extLst xmlns:a="http://schemas.openxmlformats.org/drawingml/2006/main">
               <a:ext uri="{FF2B5EF4-FFF2-40B4-BE49-F238E27FC236}">
-                <a16:creationId xmlns:a16="http://schemas.microsoft.com/office/drawing/2014/main" id="{4A828B7F-E435-4480-ABD0-D4FDE08AB7F7}"/>
+                <a16:creationId xmlns:a16="http://schemas.microsoft.com/office/drawing/2014/main" id="{C15A1784-AD85-4A94-B2BB-F630C83898CE}"/>
               </a:ext>
             </a:extLst>
           </p:cNvPr>
@@ -9775,7 +9783,7 @@
           <p:cNvPr id="14" name="">
             <a:extLst xmlns:a="http://schemas.openxmlformats.org/drawingml/2006/main">
               <a:ext uri="{FF2B5EF4-FFF2-40B4-BE49-F238E27FC236}">
-                <a16:creationId xmlns:a16="http://schemas.microsoft.com/office/drawing/2014/main" id="{57821624-C3AD-4E1D-8962-2F4D7F3E68DF}"/>
+                <a16:creationId xmlns:a16="http://schemas.microsoft.com/office/drawing/2014/main" id="{C4B616F5-E603-4B99-8B37-21DC8F0BC23A}"/>
               </a:ext>
             </a:extLst>
           </p:cNvPr>
@@ -9830,7 +9838,7 @@
     </p:spTree>
     <p:extLst>
       <p:ext uri="{BB962C8B-B14F-4D97-AF65-F5344CB8AC3E}">
-        <p14:creationId xmlns:p14="http://schemas.microsoft.com/office/powerpoint/2010/main" val="800881439"/>
+        <p14:creationId xmlns:p14="http://schemas.microsoft.com/office/powerpoint/2010/main" val="1991060393"/>
       </p:ext>
     </p:extLst>
   </p:cSld>
@@ -10031,7 +10039,7 @@
           <p:cNvPr id="16" name="">
             <a:extLst xmlns:a="http://schemas.openxmlformats.org/drawingml/2006/main">
               <a:ext uri="{FF2B5EF4-FFF2-40B4-BE49-F238E27FC236}">
-                <a16:creationId xmlns:a16="http://schemas.microsoft.com/office/drawing/2014/main" id="{4E7FA032-E5D8-436D-814A-DB42F32E651B}"/>
+                <a16:creationId xmlns:a16="http://schemas.microsoft.com/office/drawing/2014/main" id="{74D7BBB4-4D6D-4455-9857-6D068943947E}"/>
               </a:ext>
             </a:extLst>
           </p:cNvPr>
@@ -10063,7 +10071,7 @@
           <p:cNvPr id="2" name="">
             <a:extLst xmlns:a="http://schemas.openxmlformats.org/drawingml/2006/main">
               <a:ext uri="{FF2B5EF4-FFF2-40B4-BE49-F238E27FC236}">
-                <a16:creationId xmlns:a16="http://schemas.microsoft.com/office/drawing/2014/main" id="{10F59D2A-D3CA-44C9-974D-18E953F79534}"/>
+                <a16:creationId xmlns:a16="http://schemas.microsoft.com/office/drawing/2014/main" id="{7F6D1CA3-4D2A-42EE-885A-8D35FA9AFB07}"/>
               </a:ext>
             </a:extLst>
           </p:cNvPr>
@@ -10120,7 +10128,7 @@
           <p:cNvPr id="3" name="">
             <a:extLst xmlns:a="http://schemas.openxmlformats.org/drawingml/2006/main">
               <a:ext uri="{FF2B5EF4-FFF2-40B4-BE49-F238E27FC236}">
-                <a16:creationId xmlns:a16="http://schemas.microsoft.com/office/drawing/2014/main" id="{21EB7ABE-E7EE-4F2F-AB37-DE9854E86455}"/>
+                <a16:creationId xmlns:a16="http://schemas.microsoft.com/office/drawing/2014/main" id="{61E3ED23-7BFE-4B2C-AD2F-3CC84615AB3E}"/>
               </a:ext>
             </a:extLst>
           </p:cNvPr>
@@ -10152,7 +10160,7 @@
           <p:cNvPr id="4" name="">
             <a:extLst xmlns:a="http://schemas.openxmlformats.org/drawingml/2006/main">
               <a:ext uri="{FF2B5EF4-FFF2-40B4-BE49-F238E27FC236}">
-                <a16:creationId xmlns:a16="http://schemas.microsoft.com/office/drawing/2014/main" id="{15E094FB-57AF-4273-A1CF-5133B7EDA5BF}"/>
+                <a16:creationId xmlns:a16="http://schemas.microsoft.com/office/drawing/2014/main" id="{059863F7-D651-45D3-99F1-4698097E0A45}"/>
               </a:ext>
             </a:extLst>
           </p:cNvPr>
@@ -10209,7 +10217,7 @@
           <p:cNvPr id="5" name="">
             <a:extLst xmlns:a="http://schemas.openxmlformats.org/drawingml/2006/main">
               <a:ext uri="{FF2B5EF4-FFF2-40B4-BE49-F238E27FC236}">
-                <a16:creationId xmlns:a16="http://schemas.microsoft.com/office/drawing/2014/main" id="{49640DDF-8B3B-4309-8704-B57684BEF6B8}"/>
+                <a16:creationId xmlns:a16="http://schemas.microsoft.com/office/drawing/2014/main" id="{72520C07-BCBE-4F37-91C2-1C0DD322D37B}"/>
               </a:ext>
             </a:extLst>
           </p:cNvPr>
@@ -10266,7 +10274,7 @@
           <p:cNvPr id="6" name="">
             <a:extLst xmlns:a="http://schemas.openxmlformats.org/drawingml/2006/main">
               <a:ext uri="{FF2B5EF4-FFF2-40B4-BE49-F238E27FC236}">
-                <a16:creationId xmlns:a16="http://schemas.microsoft.com/office/drawing/2014/main" id="{86AD9667-0626-4F8B-B015-7C1C37D4A2BF}"/>
+                <a16:creationId xmlns:a16="http://schemas.microsoft.com/office/drawing/2014/main" id="{8FAEC03C-E975-4794-9D60-27BC1CB26170}"/>
               </a:ext>
             </a:extLst>
           </p:cNvPr>
@@ -10323,7 +10331,7 @@
           <p:cNvPr id="7" name="">
             <a:extLst xmlns:a="http://schemas.openxmlformats.org/drawingml/2006/main">
               <a:ext uri="{FF2B5EF4-FFF2-40B4-BE49-F238E27FC236}">
-                <a16:creationId xmlns:a16="http://schemas.microsoft.com/office/drawing/2014/main" id="{1E225D4F-A9C2-4657-89E1-62CDF75E7D44}"/>
+                <a16:creationId xmlns:a16="http://schemas.microsoft.com/office/drawing/2014/main" id="{73CD84E2-2AA7-492A-898F-0BE7B23598CB}"/>
               </a:ext>
             </a:extLst>
           </p:cNvPr>
@@ -10355,7 +10363,7 @@
           <p:cNvPr id="8" name="">
             <a:extLst xmlns:a="http://schemas.openxmlformats.org/drawingml/2006/main">
               <a:ext uri="{FF2B5EF4-FFF2-40B4-BE49-F238E27FC236}">
-                <a16:creationId xmlns:a16="http://schemas.microsoft.com/office/drawing/2014/main" id="{469CDE6B-5165-4964-8C1C-C09D0B1F1CFF}"/>
+                <a16:creationId xmlns:a16="http://schemas.microsoft.com/office/drawing/2014/main" id="{93D00245-C6EB-4FFF-BED5-15004B0F561E}"/>
               </a:ext>
             </a:extLst>
           </p:cNvPr>
@@ -10412,7 +10420,7 @@
           <p:cNvPr id="9" name="">
             <a:extLst xmlns:a="http://schemas.openxmlformats.org/drawingml/2006/main">
               <a:ext uri="{FF2B5EF4-FFF2-40B4-BE49-F238E27FC236}">
-                <a16:creationId xmlns:a16="http://schemas.microsoft.com/office/drawing/2014/main" id="{6B8C291F-D3E1-4131-B8A0-18CBF8EB6A30}"/>
+                <a16:creationId xmlns:a16="http://schemas.microsoft.com/office/drawing/2014/main" id="{7EDA39A9-2616-457E-97F5-2652CB4510CA}"/>
               </a:ext>
             </a:extLst>
           </p:cNvPr>
@@ -10469,7 +10477,7 @@
           <p:cNvPr id="10" name="">
             <a:extLst xmlns:a="http://schemas.openxmlformats.org/drawingml/2006/main">
               <a:ext uri="{FF2B5EF4-FFF2-40B4-BE49-F238E27FC236}">
-                <a16:creationId xmlns:a16="http://schemas.microsoft.com/office/drawing/2014/main" id="{CE13FD54-7DA8-4871-BC9D-E46C0F540963}"/>
+                <a16:creationId xmlns:a16="http://schemas.microsoft.com/office/drawing/2014/main" id="{D0175ED2-F10D-4018-86F4-5C6FD63D6AD2}"/>
               </a:ext>
             </a:extLst>
           </p:cNvPr>
@@ -10526,7 +10534,7 @@
           <p:cNvPr id="11" name="">
             <a:extLst xmlns:a="http://schemas.openxmlformats.org/drawingml/2006/main">
               <a:ext uri="{FF2B5EF4-FFF2-40B4-BE49-F238E27FC236}">
-                <a16:creationId xmlns:a16="http://schemas.microsoft.com/office/drawing/2014/main" id="{57C2A5EB-3AC4-4CAE-8FFD-AA8CBA3B4C54}"/>
+                <a16:creationId xmlns:a16="http://schemas.microsoft.com/office/drawing/2014/main" id="{80BD324F-5D7F-4F01-AD3F-C56E7589849D}"/>
               </a:ext>
             </a:extLst>
           </p:cNvPr>
@@ -10583,7 +10591,7 @@
           <p:cNvPr id="12" name="">
             <a:extLst xmlns:a="http://schemas.openxmlformats.org/drawingml/2006/main">
               <a:ext uri="{FF2B5EF4-FFF2-40B4-BE49-F238E27FC236}">
-                <a16:creationId xmlns:a16="http://schemas.microsoft.com/office/drawing/2014/main" id="{FB38C243-8CCF-49EA-9D26-F658CAEFB581}"/>
+                <a16:creationId xmlns:a16="http://schemas.microsoft.com/office/drawing/2014/main" id="{95489432-37B2-4962-BB7A-2071CDA24C7E}"/>
               </a:ext>
             </a:extLst>
           </p:cNvPr>
@@ -10640,7 +10648,7 @@
           <p:cNvPr id="13" name="">
             <a:extLst xmlns:a="http://schemas.openxmlformats.org/drawingml/2006/main">
               <a:ext uri="{FF2B5EF4-FFF2-40B4-BE49-F238E27FC236}">
-                <a16:creationId xmlns:a16="http://schemas.microsoft.com/office/drawing/2014/main" id="{7A326463-4650-43BC-909E-2ED1CE1A52E6}"/>
+                <a16:creationId xmlns:a16="http://schemas.microsoft.com/office/drawing/2014/main" id="{8DA6056A-B4AB-43CC-8C78-D8A911D52A4C}"/>
               </a:ext>
             </a:extLst>
           </p:cNvPr>
@@ -10697,7 +10705,7 @@
           <p:cNvPr id="14" name="">
             <a:extLst xmlns:a="http://schemas.openxmlformats.org/drawingml/2006/main">
               <a:ext uri="{FF2B5EF4-FFF2-40B4-BE49-F238E27FC236}">
-                <a16:creationId xmlns:a16="http://schemas.microsoft.com/office/drawing/2014/main" id="{22AAEC56-A9D1-44ED-A3E1-AC9414AE0549}"/>
+                <a16:creationId xmlns:a16="http://schemas.microsoft.com/office/drawing/2014/main" id="{B529E3BA-861B-4571-920C-44376677C53A}"/>
               </a:ext>
             </a:extLst>
           </p:cNvPr>
@@ -10754,7 +10762,7 @@
           <p:cNvPr id="15" name="">
             <a:extLst xmlns:a="http://schemas.openxmlformats.org/drawingml/2006/main">
               <a:ext uri="{FF2B5EF4-FFF2-40B4-BE49-F238E27FC236}">
-                <a16:creationId xmlns:a16="http://schemas.microsoft.com/office/drawing/2014/main" id="{69E48A8A-A49B-45BE-9D4B-C4A685F1C5C1}"/>
+                <a16:creationId xmlns:a16="http://schemas.microsoft.com/office/drawing/2014/main" id="{910B30AB-6B0D-4E5A-B039-EBF44A75F882}"/>
               </a:ext>
             </a:extLst>
           </p:cNvPr>
@@ -10809,7 +10817,7 @@
     </p:spTree>
     <p:extLst>
       <p:ext uri="{BB962C8B-B14F-4D97-AF65-F5344CB8AC3E}">
-        <p14:creationId xmlns:p14="http://schemas.microsoft.com/office/powerpoint/2010/main" val="1749431856"/>
+        <p14:creationId xmlns:p14="http://schemas.microsoft.com/office/powerpoint/2010/main" val="1179690616"/>
       </p:ext>
     </p:extLst>
   </p:cSld>
@@ -10964,7 +10972,7 @@
           <p:cNvPr id="16" name="">
             <a:extLst xmlns:a="http://schemas.openxmlformats.org/drawingml/2006/main">
               <a:ext uri="{FF2B5EF4-FFF2-40B4-BE49-F238E27FC236}">
-                <a16:creationId xmlns:a16="http://schemas.microsoft.com/office/drawing/2014/main" id="{AAD61D21-E9A9-4ADC-8EE5-A8CCF7B479D0}"/>
+                <a16:creationId xmlns:a16="http://schemas.microsoft.com/office/drawing/2014/main" id="{EC5073D8-8470-4061-9A50-D8152C4700F3}"/>
               </a:ext>
             </a:extLst>
           </p:cNvPr>
@@ -10996,7 +11004,7 @@
           <p:cNvPr id="2" name="">
             <a:extLst xmlns:a="http://schemas.openxmlformats.org/drawingml/2006/main">
               <a:ext uri="{FF2B5EF4-FFF2-40B4-BE49-F238E27FC236}">
-                <a16:creationId xmlns:a16="http://schemas.microsoft.com/office/drawing/2014/main" id="{A5155A7E-8417-4978-BAC0-9B40A46F6B8D}"/>
+                <a16:creationId xmlns:a16="http://schemas.microsoft.com/office/drawing/2014/main" id="{E2F01C68-C4A5-434D-84CB-6D305618C1C2}"/>
               </a:ext>
             </a:extLst>
           </p:cNvPr>
@@ -11053,7 +11061,7 @@
           <p:cNvPr id="3" name="">
             <a:extLst xmlns:a="http://schemas.openxmlformats.org/drawingml/2006/main">
               <a:ext uri="{FF2B5EF4-FFF2-40B4-BE49-F238E27FC236}">
-                <a16:creationId xmlns:a16="http://schemas.microsoft.com/office/drawing/2014/main" id="{0AC97F30-758B-4275-80EB-8EBA74E8A670}"/>
+                <a16:creationId xmlns:a16="http://schemas.microsoft.com/office/drawing/2014/main" id="{C3EAE293-BB4C-4D66-B1F6-046A4914A838}"/>
               </a:ext>
             </a:extLst>
           </p:cNvPr>
@@ -11085,7 +11093,7 @@
           <p:cNvPr id="4" name="">
             <a:extLst xmlns:a="http://schemas.openxmlformats.org/drawingml/2006/main">
               <a:ext uri="{FF2B5EF4-FFF2-40B4-BE49-F238E27FC236}">
-                <a16:creationId xmlns:a16="http://schemas.microsoft.com/office/drawing/2014/main" id="{88ECE17A-DD78-4D3F-A801-D68411611475}"/>
+                <a16:creationId xmlns:a16="http://schemas.microsoft.com/office/drawing/2014/main" id="{28361982-DC0C-4E96-907D-17867D170165}"/>
               </a:ext>
             </a:extLst>
           </p:cNvPr>
@@ -11142,7 +11150,7 @@
           <p:cNvPr id="5" name="">
             <a:extLst xmlns:a="http://schemas.openxmlformats.org/drawingml/2006/main">
               <a:ext uri="{FF2B5EF4-FFF2-40B4-BE49-F238E27FC236}">
-                <a16:creationId xmlns:a16="http://schemas.microsoft.com/office/drawing/2014/main" id="{3C01CA98-DE3F-49CA-ADFD-B30EBEBED36D}"/>
+                <a16:creationId xmlns:a16="http://schemas.microsoft.com/office/drawing/2014/main" id="{865942F2-4962-4ED3-898E-04F4AADB7290}"/>
               </a:ext>
             </a:extLst>
           </p:cNvPr>
@@ -11199,7 +11207,7 @@
           <p:cNvPr id="6" name="">
             <a:extLst xmlns:a="http://schemas.openxmlformats.org/drawingml/2006/main">
               <a:ext uri="{FF2B5EF4-FFF2-40B4-BE49-F238E27FC236}">
-                <a16:creationId xmlns:a16="http://schemas.microsoft.com/office/drawing/2014/main" id="{44442DAB-8BDD-46AF-B88A-B22D946D4738}"/>
+                <a16:creationId xmlns:a16="http://schemas.microsoft.com/office/drawing/2014/main" id="{6DA44EF2-E628-4392-B1D4-C5B9A96C9C25}"/>
               </a:ext>
             </a:extLst>
           </p:cNvPr>
@@ -11256,7 +11264,7 @@
           <p:cNvPr id="7" name="">
             <a:extLst xmlns:a="http://schemas.openxmlformats.org/drawingml/2006/main">
               <a:ext uri="{FF2B5EF4-FFF2-40B4-BE49-F238E27FC236}">
-                <a16:creationId xmlns:a16="http://schemas.microsoft.com/office/drawing/2014/main" id="{37D75722-BAB2-4FAE-A6CF-76822C1F8426}"/>
+                <a16:creationId xmlns:a16="http://schemas.microsoft.com/office/drawing/2014/main" id="{10ACFCA6-70F3-49CD-B1E8-A42438D2C18A}"/>
               </a:ext>
             </a:extLst>
           </p:cNvPr>
@@ -11288,7 +11296,7 @@
           <p:cNvPr id="8" name="">
             <a:extLst xmlns:a="http://schemas.openxmlformats.org/drawingml/2006/main">
               <a:ext uri="{FF2B5EF4-FFF2-40B4-BE49-F238E27FC236}">
-                <a16:creationId xmlns:a16="http://schemas.microsoft.com/office/drawing/2014/main" id="{D22F71EA-7B74-4E57-92B0-B93C1912314C}"/>
+                <a16:creationId xmlns:a16="http://schemas.microsoft.com/office/drawing/2014/main" id="{56ED417E-4B88-4446-B7F3-CAF9F8E13F09}"/>
               </a:ext>
             </a:extLst>
           </p:cNvPr>
@@ -11345,7 +11353,7 @@
           <p:cNvPr id="9" name="">
             <a:extLst xmlns:a="http://schemas.openxmlformats.org/drawingml/2006/main">
               <a:ext uri="{FF2B5EF4-FFF2-40B4-BE49-F238E27FC236}">
-                <a16:creationId xmlns:a16="http://schemas.microsoft.com/office/drawing/2014/main" id="{EAD6C90C-775A-4107-AEC8-7D6140732421}"/>
+                <a16:creationId xmlns:a16="http://schemas.microsoft.com/office/drawing/2014/main" id="{D5555EF2-E5BE-4454-BAD3-16575FB21EA0}"/>
               </a:ext>
             </a:extLst>
           </p:cNvPr>
@@ -11406,7 +11414,7 @@
           <p:nvPr/>
         </p:nvPicPr>
         <p:blipFill>
-          <a:blip xmlns:r="http://schemas.openxmlformats.org/officeDocument/2006/relationships" xmlns:a="http://schemas.openxmlformats.org/drawingml/2006/main" r:embed="R557360c3a02548c1"/>
+          <a:blip xmlns:r="http://schemas.openxmlformats.org/officeDocument/2006/relationships" xmlns:a="http://schemas.openxmlformats.org/drawingml/2006/main" r:embed="R8e77641e69764d75"/>
           <a:stretch xmlns:a="http://schemas.openxmlformats.org/drawingml/2006/main"/>
         </p:blipFill>
         <p:spPr>
@@ -11424,7 +11432,7 @@
           <p:cNvPr id="11" name="">
             <a:extLst xmlns:a="http://schemas.openxmlformats.org/drawingml/2006/main">
               <a:ext uri="{FF2B5EF4-FFF2-40B4-BE49-F238E27FC236}">
-                <a16:creationId xmlns:a16="http://schemas.microsoft.com/office/drawing/2014/main" id="{4F86B3CB-FC2C-42EF-812B-8BAECAE5E2C5}"/>
+                <a16:creationId xmlns:a16="http://schemas.microsoft.com/office/drawing/2014/main" id="{3A39CDC1-66E0-4CAD-9096-712221B06196}"/>
               </a:ext>
             </a:extLst>
           </p:cNvPr>
@@ -11481,7 +11489,7 @@
           <p:cNvPr id="12" name="">
             <a:extLst xmlns:a="http://schemas.openxmlformats.org/drawingml/2006/main">
               <a:ext uri="{FF2B5EF4-FFF2-40B4-BE49-F238E27FC236}">
-                <a16:creationId xmlns:a16="http://schemas.microsoft.com/office/drawing/2014/main" id="{325EE54E-E755-4D26-B5F2-A72BB08DD25B}"/>
+                <a16:creationId xmlns:a16="http://schemas.microsoft.com/office/drawing/2014/main" id="{573C1E5E-B860-403E-981C-89F4A900A4B2}"/>
               </a:ext>
             </a:extLst>
           </p:cNvPr>
@@ -11538,7 +11546,7 @@
           <p:cNvPr id="13" name="">
             <a:extLst xmlns:a="http://schemas.openxmlformats.org/drawingml/2006/main">
               <a:ext uri="{FF2B5EF4-FFF2-40B4-BE49-F238E27FC236}">
-                <a16:creationId xmlns:a16="http://schemas.microsoft.com/office/drawing/2014/main" id="{A8AEE726-341F-46B0-8DB3-FD6777F3F7A3}"/>
+                <a16:creationId xmlns:a16="http://schemas.microsoft.com/office/drawing/2014/main" id="{D809BA70-9C8B-46D4-AD19-18FF8F490002}"/>
               </a:ext>
             </a:extLst>
           </p:cNvPr>
@@ -11570,7 +11578,7 @@
           <p:cNvPr id="14" name="">
             <a:extLst xmlns:a="http://schemas.openxmlformats.org/drawingml/2006/main">
               <a:ext uri="{FF2B5EF4-FFF2-40B4-BE49-F238E27FC236}">
-                <a16:creationId xmlns:a16="http://schemas.microsoft.com/office/drawing/2014/main" id="{1A432A53-356D-4A2A-8944-9BD3777586FA}"/>
+                <a16:creationId xmlns:a16="http://schemas.microsoft.com/office/drawing/2014/main" id="{7D8256DE-75D5-49D1-A0AB-3A2FE59719FF}"/>
               </a:ext>
             </a:extLst>
           </p:cNvPr>
@@ -11627,7 +11635,7 @@
           <p:cNvPr id="15" name="">
             <a:extLst xmlns:a="http://schemas.openxmlformats.org/drawingml/2006/main">
               <a:ext uri="{FF2B5EF4-FFF2-40B4-BE49-F238E27FC236}">
-                <a16:creationId xmlns:a16="http://schemas.microsoft.com/office/drawing/2014/main" id="{638F134F-F3D4-46CE-AE7C-6B288B8E4F8E}"/>
+                <a16:creationId xmlns:a16="http://schemas.microsoft.com/office/drawing/2014/main" id="{EF71C0EB-312F-4E74-A4BB-6D81BD51672B}"/>
               </a:ext>
             </a:extLst>
           </p:cNvPr>
@@ -11682,7 +11690,7 @@
     </p:spTree>
     <p:extLst>
       <p:ext uri="{BB962C8B-B14F-4D97-AF65-F5344CB8AC3E}">
-        <p14:creationId xmlns:p14="http://schemas.microsoft.com/office/powerpoint/2010/main" val="416088510"/>
+        <p14:creationId xmlns:p14="http://schemas.microsoft.com/office/powerpoint/2010/main" val="976702229"/>
       </p:ext>
     </p:extLst>
   </p:cSld>
@@ -11837,7 +11845,7 @@
           <p:cNvPr id="23" name="">
             <a:extLst xmlns:a="http://schemas.openxmlformats.org/drawingml/2006/main">
               <a:ext uri="{FF2B5EF4-FFF2-40B4-BE49-F238E27FC236}">
-                <a16:creationId xmlns:a16="http://schemas.microsoft.com/office/drawing/2014/main" id="{E268BADA-12A3-42BA-A683-E5CA897BB6FA}"/>
+                <a16:creationId xmlns:a16="http://schemas.microsoft.com/office/drawing/2014/main" id="{9CAFF362-77BB-4C97-A439-9D2CE7E09EEF}"/>
               </a:ext>
             </a:extLst>
           </p:cNvPr>
@@ -11869,7 +11877,7 @@
           <p:cNvPr id="2" name="">
             <a:extLst xmlns:a="http://schemas.openxmlformats.org/drawingml/2006/main">
               <a:ext uri="{FF2B5EF4-FFF2-40B4-BE49-F238E27FC236}">
-                <a16:creationId xmlns:a16="http://schemas.microsoft.com/office/drawing/2014/main" id="{3C07C129-D118-4C09-82B6-ABFDCB22C25C}"/>
+                <a16:creationId xmlns:a16="http://schemas.microsoft.com/office/drawing/2014/main" id="{51D4E084-5685-4F09-99A6-BBB20AA537F8}"/>
               </a:ext>
             </a:extLst>
           </p:cNvPr>
@@ -11926,7 +11934,7 @@
           <p:cNvPr id="3" name="">
             <a:extLst xmlns:a="http://schemas.openxmlformats.org/drawingml/2006/main">
               <a:ext uri="{FF2B5EF4-FFF2-40B4-BE49-F238E27FC236}">
-                <a16:creationId xmlns:a16="http://schemas.microsoft.com/office/drawing/2014/main" id="{10528708-8F67-4F4A-A733-99C044CDCCC8}"/>
+                <a16:creationId xmlns:a16="http://schemas.microsoft.com/office/drawing/2014/main" id="{4EC7AF67-2D36-4160-955F-A64E62C6DA37}"/>
               </a:ext>
             </a:extLst>
           </p:cNvPr>
@@ -11958,7 +11966,7 @@
           <p:cNvPr id="4" name="">
             <a:extLst xmlns:a="http://schemas.openxmlformats.org/drawingml/2006/main">
               <a:ext uri="{FF2B5EF4-FFF2-40B4-BE49-F238E27FC236}">
-                <a16:creationId xmlns:a16="http://schemas.microsoft.com/office/drawing/2014/main" id="{18F1F5DA-DC23-4EB6-8A17-4B6524E1B59F}"/>
+                <a16:creationId xmlns:a16="http://schemas.microsoft.com/office/drawing/2014/main" id="{5178AD0C-ADCF-48EE-8A8B-300FFF4FCF0A}"/>
               </a:ext>
             </a:extLst>
           </p:cNvPr>
@@ -12015,7 +12023,7 @@
           <p:cNvPr id="5" name="">
             <a:extLst xmlns:a="http://schemas.openxmlformats.org/drawingml/2006/main">
               <a:ext uri="{FF2B5EF4-FFF2-40B4-BE49-F238E27FC236}">
-                <a16:creationId xmlns:a16="http://schemas.microsoft.com/office/drawing/2014/main" id="{1BD1B769-758B-47D8-9EAA-17D6AE224C7C}"/>
+                <a16:creationId xmlns:a16="http://schemas.microsoft.com/office/drawing/2014/main" id="{61B53305-2FE5-43C7-AF14-0F9A2322496B}"/>
               </a:ext>
             </a:extLst>
           </p:cNvPr>
@@ -12072,7 +12080,7 @@
           <p:cNvPr id="6" name="">
             <a:extLst xmlns:a="http://schemas.openxmlformats.org/drawingml/2006/main">
               <a:ext uri="{FF2B5EF4-FFF2-40B4-BE49-F238E27FC236}">
-                <a16:creationId xmlns:a16="http://schemas.microsoft.com/office/drawing/2014/main" id="{09D0CD50-8A21-4067-9E3B-B09368CE37B8}"/>
+                <a16:creationId xmlns:a16="http://schemas.microsoft.com/office/drawing/2014/main" id="{6497F15A-230B-404F-BC74-728AA8C81277}"/>
               </a:ext>
             </a:extLst>
           </p:cNvPr>
@@ -12129,7 +12137,7 @@
           <p:cNvPr id="7" name="">
             <a:extLst xmlns:a="http://schemas.openxmlformats.org/drawingml/2006/main">
               <a:ext uri="{FF2B5EF4-FFF2-40B4-BE49-F238E27FC236}">
-                <a16:creationId xmlns:a16="http://schemas.microsoft.com/office/drawing/2014/main" id="{9AE88D91-C79D-4CAF-B3AA-EFB5DB72259D}"/>
+                <a16:creationId xmlns:a16="http://schemas.microsoft.com/office/drawing/2014/main" id="{9CBC0776-28B3-4C68-BA43-F10A4BC031E1}"/>
               </a:ext>
             </a:extLst>
           </p:cNvPr>
@@ -12161,7 +12169,7 @@
           <p:cNvPr id="8" name="">
             <a:extLst xmlns:a="http://schemas.openxmlformats.org/drawingml/2006/main">
               <a:ext uri="{FF2B5EF4-FFF2-40B4-BE49-F238E27FC236}">
-                <a16:creationId xmlns:a16="http://schemas.microsoft.com/office/drawing/2014/main" id="{54361FE9-86EB-4D29-BBA9-60D366D4A6F7}"/>
+                <a16:creationId xmlns:a16="http://schemas.microsoft.com/office/drawing/2014/main" id="{04750EDF-72BD-4B28-8B5D-A96FC8F5000F}"/>
               </a:ext>
             </a:extLst>
           </p:cNvPr>
@@ -12218,7 +12226,7 @@
           <p:cNvPr id="9" name="">
             <a:extLst xmlns:a="http://schemas.openxmlformats.org/drawingml/2006/main">
               <a:ext uri="{FF2B5EF4-FFF2-40B4-BE49-F238E27FC236}">
-                <a16:creationId xmlns:a16="http://schemas.microsoft.com/office/drawing/2014/main" id="{643C965A-5231-4B01-B75B-3B33CF67BE83}"/>
+                <a16:creationId xmlns:a16="http://schemas.microsoft.com/office/drawing/2014/main" id="{5C98724C-11DA-4A8C-85CD-5EA0C9FDC7DD}"/>
               </a:ext>
             </a:extLst>
           </p:cNvPr>
@@ -12275,7 +12283,7 @@
           <p:cNvPr id="10" name="">
             <a:extLst xmlns:a="http://schemas.openxmlformats.org/drawingml/2006/main">
               <a:ext uri="{FF2B5EF4-FFF2-40B4-BE49-F238E27FC236}">
-                <a16:creationId xmlns:a16="http://schemas.microsoft.com/office/drawing/2014/main" id="{810D2F26-C77B-4B7E-8062-139D2F1C5324}"/>
+                <a16:creationId xmlns:a16="http://schemas.microsoft.com/office/drawing/2014/main" id="{5BCCC689-D8E8-41B6-8FF9-B5C669474948}"/>
               </a:ext>
             </a:extLst>
           </p:cNvPr>
@@ -12309,7 +12317,7 @@
           <p:cNvPr id="11" name="">
             <a:extLst xmlns:a="http://schemas.openxmlformats.org/drawingml/2006/main">
               <a:ext uri="{FF2B5EF4-FFF2-40B4-BE49-F238E27FC236}">
-                <a16:creationId xmlns:a16="http://schemas.microsoft.com/office/drawing/2014/main" id="{2755CA57-2B07-4A3E-A739-A33FE02149FC}"/>
+                <a16:creationId xmlns:a16="http://schemas.microsoft.com/office/drawing/2014/main" id="{9E90B491-E5A8-412F-9045-BCFF38CC792B}"/>
               </a:ext>
             </a:extLst>
           </p:cNvPr>
@@ -12341,7 +12349,7 @@
           <p:cNvPr id="12" name="">
             <a:extLst xmlns:a="http://schemas.openxmlformats.org/drawingml/2006/main">
               <a:ext uri="{FF2B5EF4-FFF2-40B4-BE49-F238E27FC236}">
-                <a16:creationId xmlns:a16="http://schemas.microsoft.com/office/drawing/2014/main" id="{5F22D7AB-0D4F-43BC-9601-6D20F0E46E24}"/>
+                <a16:creationId xmlns:a16="http://schemas.microsoft.com/office/drawing/2014/main" id="{CD7F5AA9-0B6C-4C4E-A01F-29523DFAF462}"/>
               </a:ext>
             </a:extLst>
           </p:cNvPr>
@@ -12398,7 +12406,7 @@
           <p:cNvPr id="13" name="">
             <a:extLst xmlns:a="http://schemas.openxmlformats.org/drawingml/2006/main">
               <a:ext uri="{FF2B5EF4-FFF2-40B4-BE49-F238E27FC236}">
-                <a16:creationId xmlns:a16="http://schemas.microsoft.com/office/drawing/2014/main" id="{B2381A57-D81E-4B32-844D-31177DBE90A4}"/>
+                <a16:creationId xmlns:a16="http://schemas.microsoft.com/office/drawing/2014/main" id="{F67FEFAF-5A98-4A54-AE99-A57CA85C317B}"/>
               </a:ext>
             </a:extLst>
           </p:cNvPr>
@@ -12455,7 +12463,7 @@
           <p:cNvPr id="14" name="">
             <a:extLst xmlns:a="http://schemas.openxmlformats.org/drawingml/2006/main">
               <a:ext uri="{FF2B5EF4-FFF2-40B4-BE49-F238E27FC236}">
-                <a16:creationId xmlns:a16="http://schemas.microsoft.com/office/drawing/2014/main" id="{BE6AB459-B353-457D-92C7-AB1427B06B54}"/>
+                <a16:creationId xmlns:a16="http://schemas.microsoft.com/office/drawing/2014/main" id="{EA20BAA2-598F-42FF-A005-08FC393F989D}"/>
               </a:ext>
             </a:extLst>
           </p:cNvPr>
@@ -12489,7 +12497,7 @@
           <p:cNvPr id="15" name="">
             <a:extLst xmlns:a="http://schemas.openxmlformats.org/drawingml/2006/main">
               <a:ext uri="{FF2B5EF4-FFF2-40B4-BE49-F238E27FC236}">
-                <a16:creationId xmlns:a16="http://schemas.microsoft.com/office/drawing/2014/main" id="{3EA0CAD0-FBF4-4E08-9233-D00DFAA8053A}"/>
+                <a16:creationId xmlns:a16="http://schemas.microsoft.com/office/drawing/2014/main" id="{109F2027-7556-4731-A3E5-88C06AE4858B}"/>
               </a:ext>
             </a:extLst>
           </p:cNvPr>
@@ -12521,7 +12529,7 @@
           <p:cNvPr id="16" name="">
             <a:extLst xmlns:a="http://schemas.openxmlformats.org/drawingml/2006/main">
               <a:ext uri="{FF2B5EF4-FFF2-40B4-BE49-F238E27FC236}">
-                <a16:creationId xmlns:a16="http://schemas.microsoft.com/office/drawing/2014/main" id="{5FB9AAD3-A859-4185-A31D-65F5720C0450}"/>
+                <a16:creationId xmlns:a16="http://schemas.microsoft.com/office/drawing/2014/main" id="{3E283A0D-3668-476B-BC0B-8CC58393BBE5}"/>
               </a:ext>
             </a:extLst>
           </p:cNvPr>
@@ -12578,7 +12586,7 @@
           <p:cNvPr id="17" name="">
             <a:extLst xmlns:a="http://schemas.openxmlformats.org/drawingml/2006/main">
               <a:ext uri="{FF2B5EF4-FFF2-40B4-BE49-F238E27FC236}">
-                <a16:creationId xmlns:a16="http://schemas.microsoft.com/office/drawing/2014/main" id="{0F94FD4D-0B72-4EA6-9517-F94B6ACEF3B8}"/>
+                <a16:creationId xmlns:a16="http://schemas.microsoft.com/office/drawing/2014/main" id="{86FD0AC7-FCB0-4FB0-B439-2E27130A66BD}"/>
               </a:ext>
             </a:extLst>
           </p:cNvPr>
@@ -12635,7 +12643,7 @@
           <p:cNvPr id="18" name="">
             <a:extLst xmlns:a="http://schemas.openxmlformats.org/drawingml/2006/main">
               <a:ext uri="{FF2B5EF4-FFF2-40B4-BE49-F238E27FC236}">
-                <a16:creationId xmlns:a16="http://schemas.microsoft.com/office/drawing/2014/main" id="{F4D344C9-C9CD-4FB8-986C-E172AFEFD100}"/>
+                <a16:creationId xmlns:a16="http://schemas.microsoft.com/office/drawing/2014/main" id="{0C98284F-82CE-41D0-8B65-F993DB7C24E9}"/>
               </a:ext>
             </a:extLst>
           </p:cNvPr>
@@ -12669,7 +12677,7 @@
           <p:cNvPr id="19" name="">
             <a:extLst xmlns:a="http://schemas.openxmlformats.org/drawingml/2006/main">
               <a:ext uri="{FF2B5EF4-FFF2-40B4-BE49-F238E27FC236}">
-                <a16:creationId xmlns:a16="http://schemas.microsoft.com/office/drawing/2014/main" id="{D0416E62-6B44-4686-8E62-614D86FF5EA0}"/>
+                <a16:creationId xmlns:a16="http://schemas.microsoft.com/office/drawing/2014/main" id="{AFBC0C35-7C73-4A6D-BB73-76BA11BEE7F8}"/>
               </a:ext>
             </a:extLst>
           </p:cNvPr>
@@ -12701,7 +12709,7 @@
           <p:cNvPr id="20" name="">
             <a:extLst xmlns:a="http://schemas.openxmlformats.org/drawingml/2006/main">
               <a:ext uri="{FF2B5EF4-FFF2-40B4-BE49-F238E27FC236}">
-                <a16:creationId xmlns:a16="http://schemas.microsoft.com/office/drawing/2014/main" id="{216F0074-57E0-4266-8985-5D785B36F25C}"/>
+                <a16:creationId xmlns:a16="http://schemas.microsoft.com/office/drawing/2014/main" id="{567D65AC-D8C7-4981-BA82-E86AEA19A33E}"/>
               </a:ext>
             </a:extLst>
           </p:cNvPr>
@@ -12758,7 +12766,7 @@
           <p:cNvPr id="21" name="">
             <a:extLst xmlns:a="http://schemas.openxmlformats.org/drawingml/2006/main">
               <a:ext uri="{FF2B5EF4-FFF2-40B4-BE49-F238E27FC236}">
-                <a16:creationId xmlns:a16="http://schemas.microsoft.com/office/drawing/2014/main" id="{862BDCB5-591E-4441-B97B-30FAA6ACBA41}"/>
+                <a16:creationId xmlns:a16="http://schemas.microsoft.com/office/drawing/2014/main" id="{058DB913-B32A-4328-88DA-E6D6B6D672D2}"/>
               </a:ext>
             </a:extLst>
           </p:cNvPr>
@@ -12815,7 +12823,7 @@
           <p:cNvPr id="22" name="">
             <a:extLst xmlns:a="http://schemas.openxmlformats.org/drawingml/2006/main">
               <a:ext uri="{FF2B5EF4-FFF2-40B4-BE49-F238E27FC236}">
-                <a16:creationId xmlns:a16="http://schemas.microsoft.com/office/drawing/2014/main" id="{2A6FE99C-3BCA-4FA5-B8DE-3073B8081705}"/>
+                <a16:creationId xmlns:a16="http://schemas.microsoft.com/office/drawing/2014/main" id="{F4D038B6-96B2-4534-862B-9644A16DE8CE}"/>
               </a:ext>
             </a:extLst>
           </p:cNvPr>
@@ -12870,7 +12878,7 @@
     </p:spTree>
     <p:extLst>
       <p:ext uri="{BB962C8B-B14F-4D97-AF65-F5344CB8AC3E}">
-        <p14:creationId xmlns:p14="http://schemas.microsoft.com/office/powerpoint/2010/main" val="372178381"/>
+        <p14:creationId xmlns:p14="http://schemas.microsoft.com/office/powerpoint/2010/main" val="886633361"/>
       </p:ext>
     </p:extLst>
   </p:cSld>
@@ -13071,7 +13079,7 @@
           <p:cNvPr id="22" name="">
             <a:extLst xmlns:a="http://schemas.openxmlformats.org/drawingml/2006/main">
               <a:ext uri="{FF2B5EF4-FFF2-40B4-BE49-F238E27FC236}">
-                <a16:creationId xmlns:a16="http://schemas.microsoft.com/office/drawing/2014/main" id="{558EC11E-4A54-4A9D-863C-D517B7BB242E}"/>
+                <a16:creationId xmlns:a16="http://schemas.microsoft.com/office/drawing/2014/main" id="{516927A5-2DDD-45D0-B06F-3D0CAA429E3D}"/>
               </a:ext>
             </a:extLst>
           </p:cNvPr>
@@ -13103,7 +13111,7 @@
           <p:cNvPr id="2" name="">
             <a:extLst xmlns:a="http://schemas.openxmlformats.org/drawingml/2006/main">
               <a:ext uri="{FF2B5EF4-FFF2-40B4-BE49-F238E27FC236}">
-                <a16:creationId xmlns:a16="http://schemas.microsoft.com/office/drawing/2014/main" id="{A858597B-77B7-4FC8-AB04-92477CDBF519}"/>
+                <a16:creationId xmlns:a16="http://schemas.microsoft.com/office/drawing/2014/main" id="{C8762A6B-DB25-41A0-BE2D-CFF140E43FDF}"/>
               </a:ext>
             </a:extLst>
           </p:cNvPr>
@@ -13160,7 +13168,7 @@
           <p:cNvPr id="3" name="">
             <a:extLst xmlns:a="http://schemas.openxmlformats.org/drawingml/2006/main">
               <a:ext uri="{FF2B5EF4-FFF2-40B4-BE49-F238E27FC236}">
-                <a16:creationId xmlns:a16="http://schemas.microsoft.com/office/drawing/2014/main" id="{A2291048-6D69-4A4A-B625-86FA748DAF16}"/>
+                <a16:creationId xmlns:a16="http://schemas.microsoft.com/office/drawing/2014/main" id="{FC9A024C-F63C-4D53-8D1F-2374B1AFCD7F}"/>
               </a:ext>
             </a:extLst>
           </p:cNvPr>
@@ -13192,7 +13200,7 @@
           <p:cNvPr id="4" name="">
             <a:extLst xmlns:a="http://schemas.openxmlformats.org/drawingml/2006/main">
               <a:ext uri="{FF2B5EF4-FFF2-40B4-BE49-F238E27FC236}">
-                <a16:creationId xmlns:a16="http://schemas.microsoft.com/office/drawing/2014/main" id="{6C5D1421-C999-4180-9052-10EF10989C03}"/>
+                <a16:creationId xmlns:a16="http://schemas.microsoft.com/office/drawing/2014/main" id="{EA96F439-FFD8-4B79-BED9-6AEB989B54E6}"/>
               </a:ext>
             </a:extLst>
           </p:cNvPr>
@@ -13249,7 +13257,7 @@
           <p:cNvPr id="5" name="">
             <a:extLst xmlns:a="http://schemas.openxmlformats.org/drawingml/2006/main">
               <a:ext uri="{FF2B5EF4-FFF2-40B4-BE49-F238E27FC236}">
-                <a16:creationId xmlns:a16="http://schemas.microsoft.com/office/drawing/2014/main" id="{1CB0F4C7-0852-4008-8070-EB25EC9101E4}"/>
+                <a16:creationId xmlns:a16="http://schemas.microsoft.com/office/drawing/2014/main" id="{74E22A15-F8CF-4877-9264-B40B3B57C328}"/>
               </a:ext>
             </a:extLst>
           </p:cNvPr>
@@ -13306,7 +13314,7 @@
           <p:cNvPr id="6" name="">
             <a:extLst xmlns:a="http://schemas.openxmlformats.org/drawingml/2006/main">
               <a:ext uri="{FF2B5EF4-FFF2-40B4-BE49-F238E27FC236}">
-                <a16:creationId xmlns:a16="http://schemas.microsoft.com/office/drawing/2014/main" id="{A56C6026-B7B0-4D22-AB06-FF3519FB5FEB}"/>
+                <a16:creationId xmlns:a16="http://schemas.microsoft.com/office/drawing/2014/main" id="{BAA77F94-768D-4F71-9E1F-469C68A57DE4}"/>
               </a:ext>
             </a:extLst>
           </p:cNvPr>
@@ -13363,7 +13371,7 @@
           <p:cNvPr id="7" name="">
             <a:extLst xmlns:a="http://schemas.openxmlformats.org/drawingml/2006/main">
               <a:ext uri="{FF2B5EF4-FFF2-40B4-BE49-F238E27FC236}">
-                <a16:creationId xmlns:a16="http://schemas.microsoft.com/office/drawing/2014/main" id="{D672B84E-227A-4F60-9904-C9AE257ECB9C}"/>
+                <a16:creationId xmlns:a16="http://schemas.microsoft.com/office/drawing/2014/main" id="{F3651707-3F03-4F36-BDA3-8D85E3FA008E}"/>
               </a:ext>
             </a:extLst>
           </p:cNvPr>
@@ -13395,7 +13403,7 @@
           <p:cNvPr id="8" name="">
             <a:extLst xmlns:a="http://schemas.openxmlformats.org/drawingml/2006/main">
               <a:ext uri="{FF2B5EF4-FFF2-40B4-BE49-F238E27FC236}">
-                <a16:creationId xmlns:a16="http://schemas.microsoft.com/office/drawing/2014/main" id="{545EC291-F0E1-4D37-9150-4196230579AE}"/>
+                <a16:creationId xmlns:a16="http://schemas.microsoft.com/office/drawing/2014/main" id="{34F287C5-0BE0-4CC4-957E-78275CC1EA35}"/>
               </a:ext>
             </a:extLst>
           </p:cNvPr>
@@ -13452,7 +13460,7 @@
           <p:cNvPr id="9" name="">
             <a:extLst xmlns:a="http://schemas.openxmlformats.org/drawingml/2006/main">
               <a:ext uri="{FF2B5EF4-FFF2-40B4-BE49-F238E27FC236}">
-                <a16:creationId xmlns:a16="http://schemas.microsoft.com/office/drawing/2014/main" id="{AA29FE76-F9C6-4F32-B504-69747879516D}"/>
+                <a16:creationId xmlns:a16="http://schemas.microsoft.com/office/drawing/2014/main" id="{BB8C0FC8-D31E-44F9-89C7-EEB49E9083ED}"/>
               </a:ext>
             </a:extLst>
           </p:cNvPr>
@@ -13509,7 +13517,7 @@
           <p:cNvPr id="10" name="">
             <a:extLst xmlns:a="http://schemas.openxmlformats.org/drawingml/2006/main">
               <a:ext uri="{FF2B5EF4-FFF2-40B4-BE49-F238E27FC236}">
-                <a16:creationId xmlns:a16="http://schemas.microsoft.com/office/drawing/2014/main" id="{321A8A30-1781-4BB2-BAE3-F90395B01129}"/>
+                <a16:creationId xmlns:a16="http://schemas.microsoft.com/office/drawing/2014/main" id="{3D370CE2-E52D-480A-97EA-CCAA138532CE}"/>
               </a:ext>
             </a:extLst>
           </p:cNvPr>
@@ -13543,7 +13551,7 @@
           <p:cNvPr id="11" name="">
             <a:extLst xmlns:a="http://schemas.openxmlformats.org/drawingml/2006/main">
               <a:ext uri="{FF2B5EF4-FFF2-40B4-BE49-F238E27FC236}">
-                <a16:creationId xmlns:a16="http://schemas.microsoft.com/office/drawing/2014/main" id="{4B6D3C07-1D2F-4779-8663-3AD989F59769}"/>
+                <a16:creationId xmlns:a16="http://schemas.microsoft.com/office/drawing/2014/main" id="{4336E2D7-666C-4776-B0B7-C3748925E65C}"/>
               </a:ext>
             </a:extLst>
           </p:cNvPr>
@@ -13575,7 +13583,7 @@
           <p:cNvPr id="12" name="">
             <a:extLst xmlns:a="http://schemas.openxmlformats.org/drawingml/2006/main">
               <a:ext uri="{FF2B5EF4-FFF2-40B4-BE49-F238E27FC236}">
-                <a16:creationId xmlns:a16="http://schemas.microsoft.com/office/drawing/2014/main" id="{DF1767BB-DEF4-4818-89BF-A0CDAD8B53A2}"/>
+                <a16:creationId xmlns:a16="http://schemas.microsoft.com/office/drawing/2014/main" id="{C3ACBB76-E0D1-450C-89E6-66458A0A79E3}"/>
               </a:ext>
             </a:extLst>
           </p:cNvPr>
@@ -13632,7 +13640,7 @@
           <p:cNvPr id="13" name="">
             <a:extLst xmlns:a="http://schemas.openxmlformats.org/drawingml/2006/main">
               <a:ext uri="{FF2B5EF4-FFF2-40B4-BE49-F238E27FC236}">
-                <a16:creationId xmlns:a16="http://schemas.microsoft.com/office/drawing/2014/main" id="{E708BE03-D5EA-43D3-A65D-97815FAA0959}"/>
+                <a16:creationId xmlns:a16="http://schemas.microsoft.com/office/drawing/2014/main" id="{6CBC2BDB-07BE-4B07-8373-63D763E1BE44}"/>
               </a:ext>
             </a:extLst>
           </p:cNvPr>
@@ -13689,7 +13697,7 @@
           <p:cNvPr id="14" name="">
             <a:extLst xmlns:a="http://schemas.openxmlformats.org/drawingml/2006/main">
               <a:ext uri="{FF2B5EF4-FFF2-40B4-BE49-F238E27FC236}">
-                <a16:creationId xmlns:a16="http://schemas.microsoft.com/office/drawing/2014/main" id="{8C59AFD5-2190-48C6-8855-B0103A088328}"/>
+                <a16:creationId xmlns:a16="http://schemas.microsoft.com/office/drawing/2014/main" id="{E6E0373F-196E-4C64-A50F-BB4AB7FDC122}"/>
               </a:ext>
             </a:extLst>
           </p:cNvPr>
@@ -13723,7 +13731,7 @@
           <p:cNvPr id="15" name="">
             <a:extLst xmlns:a="http://schemas.openxmlformats.org/drawingml/2006/main">
               <a:ext uri="{FF2B5EF4-FFF2-40B4-BE49-F238E27FC236}">
-                <a16:creationId xmlns:a16="http://schemas.microsoft.com/office/drawing/2014/main" id="{42714B62-67F2-42AA-A048-FD2E897CE883}"/>
+                <a16:creationId xmlns:a16="http://schemas.microsoft.com/office/drawing/2014/main" id="{39A61FF6-FE56-488D-975B-8DB23BEE44B0}"/>
               </a:ext>
             </a:extLst>
           </p:cNvPr>
@@ -13755,7 +13763,7 @@
           <p:cNvPr id="16" name="">
             <a:extLst xmlns:a="http://schemas.openxmlformats.org/drawingml/2006/main">
               <a:ext uri="{FF2B5EF4-FFF2-40B4-BE49-F238E27FC236}">
-                <a16:creationId xmlns:a16="http://schemas.microsoft.com/office/drawing/2014/main" id="{555F1A42-E5D6-4BA0-B0DF-7AFB5D7A381E}"/>
+                <a16:creationId xmlns:a16="http://schemas.microsoft.com/office/drawing/2014/main" id="{806E07C6-5EFE-4D3F-B37E-EBFAC59EEF27}"/>
               </a:ext>
             </a:extLst>
           </p:cNvPr>
@@ -13812,7 +13820,7 @@
           <p:cNvPr id="17" name="">
             <a:extLst xmlns:a="http://schemas.openxmlformats.org/drawingml/2006/main">
               <a:ext uri="{FF2B5EF4-FFF2-40B4-BE49-F238E27FC236}">
-                <a16:creationId xmlns:a16="http://schemas.microsoft.com/office/drawing/2014/main" id="{5ECEC1EA-0880-41A7-99AA-3C4116B477A5}"/>
+                <a16:creationId xmlns:a16="http://schemas.microsoft.com/office/drawing/2014/main" id="{8ED471DF-9330-4C5D-9733-3C52EB75293B}"/>
               </a:ext>
             </a:extLst>
           </p:cNvPr>
@@ -13869,7 +13877,7 @@
           <p:cNvPr id="18" name="">
             <a:extLst xmlns:a="http://schemas.openxmlformats.org/drawingml/2006/main">
               <a:ext uri="{FF2B5EF4-FFF2-40B4-BE49-F238E27FC236}">
-                <a16:creationId xmlns:a16="http://schemas.microsoft.com/office/drawing/2014/main" id="{1ADAFC1F-E269-4F3F-B91C-2EED2B9CA041}"/>
+                <a16:creationId xmlns:a16="http://schemas.microsoft.com/office/drawing/2014/main" id="{652AB00C-EBEA-4BEC-AC64-747B6F1B7267}"/>
               </a:ext>
             </a:extLst>
           </p:cNvPr>
@@ -13903,7 +13911,7 @@
           <p:cNvPr id="19" name="">
             <a:extLst xmlns:a="http://schemas.openxmlformats.org/drawingml/2006/main">
               <a:ext uri="{FF2B5EF4-FFF2-40B4-BE49-F238E27FC236}">
-                <a16:creationId xmlns:a16="http://schemas.microsoft.com/office/drawing/2014/main" id="{1CEF694D-EBE1-4C3F-9957-EACDC4C0F280}"/>
+                <a16:creationId xmlns:a16="http://schemas.microsoft.com/office/drawing/2014/main" id="{85CE43FC-AC64-40EC-97EC-781E001B2274}"/>
               </a:ext>
             </a:extLst>
           </p:cNvPr>
@@ -13935,7 +13943,7 @@
           <p:cNvPr id="20" name="">
             <a:extLst xmlns:a="http://schemas.openxmlformats.org/drawingml/2006/main">
               <a:ext uri="{FF2B5EF4-FFF2-40B4-BE49-F238E27FC236}">
-                <a16:creationId xmlns:a16="http://schemas.microsoft.com/office/drawing/2014/main" id="{B1DFDE97-FFA6-41F5-9C4C-26308FB97D40}"/>
+                <a16:creationId xmlns:a16="http://schemas.microsoft.com/office/drawing/2014/main" id="{37668350-1E19-4343-9800-CE27B657FBE5}"/>
               </a:ext>
             </a:extLst>
           </p:cNvPr>
@@ -13992,7 +14000,7 @@
           <p:cNvPr id="21" name="">
             <a:extLst xmlns:a="http://schemas.openxmlformats.org/drawingml/2006/main">
               <a:ext uri="{FF2B5EF4-FFF2-40B4-BE49-F238E27FC236}">
-                <a16:creationId xmlns:a16="http://schemas.microsoft.com/office/drawing/2014/main" id="{4CDFE093-65BE-4A08-A003-985ECC8334B1}"/>
+                <a16:creationId xmlns:a16="http://schemas.microsoft.com/office/drawing/2014/main" id="{09A6388A-C69C-4605-A144-B4FCD7E5F414}"/>
               </a:ext>
             </a:extLst>
           </p:cNvPr>
@@ -14047,7 +14055,7 @@
     </p:spTree>
     <p:extLst>
       <p:ext uri="{BB962C8B-B14F-4D97-AF65-F5344CB8AC3E}">
-        <p14:creationId xmlns:p14="http://schemas.microsoft.com/office/powerpoint/2010/main" val="10762268"/>
+        <p14:creationId xmlns:p14="http://schemas.microsoft.com/office/powerpoint/2010/main" val="1010196581"/>
       </p:ext>
     </p:extLst>
   </p:cSld>
